--- a/exports/عرض-المستثمر-بيلاتس.pptx
+++ b/exports/عرض-المستثمر-بيلاتس.pptx
@@ -3221,6 +3221,8 @@
                   <a:srgbClr val="FFFFFF"/>
                 </a:solidFill>
                 <a:latin typeface="Arial"/>
+                <a:ea typeface="Arial"/>
+                <a:cs typeface="Arial"/>
               </a:rPr>
               <a:t>استوديو Reformer Pilates نسائي — الرياض</a:t>
             </a:r>
@@ -3260,6 +3262,8 @@
                   <a:srgbClr val="C9A227"/>
                 </a:solidFill>
                 <a:latin typeface="Arial"/>
+                <a:ea typeface="Arial"/>
+                <a:cs typeface="Arial"/>
               </a:rPr>
               <a:t>عرض استثماري</a:t>
             </a:r>
@@ -3299,6 +3303,8 @@
                   <a:srgbClr val="FFFFFF"/>
                 </a:solidFill>
                 <a:latin typeface="Arial"/>
+                <a:ea typeface="Arial"/>
+                <a:cs typeface="Arial"/>
               </a:rPr>
               <a:t>120 م²  |  6 أجهزة Reformer  |  دراسة جدوى — يونيو 2026</a:t>
             </a:r>
@@ -3338,6 +3344,8 @@
                   <a:srgbClr val="BBCCDD"/>
                 </a:solidFill>
                 <a:latin typeface="Arial"/>
+                <a:ea typeface="Arial"/>
+                <a:cs typeface="Arial"/>
               </a:rPr>
               <a:t>وثيقة مُعدّة لعرضها على مستثمر / صندوق استثماري</a:t>
             </a:r>
@@ -3483,6 +3491,8 @@
                   <a:srgbClr val="FFFFFF"/>
                 </a:solidFill>
                 <a:latin typeface="Arial"/>
+                <a:ea typeface="Arial"/>
+                <a:cs typeface="Arial"/>
               </a:rPr>
               <a:t>خطة النمو</a:t>
             </a:r>
@@ -3522,6 +3532,8 @@
                   <a:srgbClr val="C9A227"/>
                 </a:solidFill>
                 <a:latin typeface="Arial"/>
+                <a:ea typeface="Arial"/>
+                <a:cs typeface="Arial"/>
               </a:rPr>
               <a:t>9</a:t>
             </a:r>
@@ -3564,6 +3576,8 @@
                   <a:srgbClr val="2C2C2C"/>
                 </a:solidFill>
                 <a:latin typeface="Arial"/>
+                <a:ea typeface="Arial"/>
+                <a:cs typeface="Arial"/>
               </a:rPr>
               <a:t>•  السنة 1: بناء قاعدة العميلات (الوصول لإشغال 50%+).</a:t>
             </a:r>
@@ -3583,6 +3597,8 @@
                   <a:srgbClr val="2C2C2C"/>
                 </a:solidFill>
                 <a:latin typeface="Arial"/>
+                <a:ea typeface="Arial"/>
+                <a:cs typeface="Arial"/>
               </a:rPr>
               <a:t>•  السنة 2: تثبيت الربحية + إضافة جهازين (120 م² تستوعب 8 أجهزة بنفس الإيجار).</a:t>
             </a:r>
@@ -3602,6 +3618,8 @@
                   <a:srgbClr val="2C2C2C"/>
                 </a:solidFill>
                 <a:latin typeface="Arial"/>
+                <a:ea typeface="Arial"/>
+                <a:cs typeface="Arial"/>
               </a:rPr>
               <a:t>•  السنة 3+: غرفة نشاط ثانٍ (Mat/Barre) أو فرع ثانٍ عند إشغال 80%+ مستقر.</a:t>
             </a:r>
@@ -3747,6 +3765,8 @@
                   <a:srgbClr val="FFFFFF"/>
                 </a:solidFill>
                 <a:latin typeface="Arial"/>
+                <a:ea typeface="Arial"/>
+                <a:cs typeface="Arial"/>
               </a:rPr>
               <a:t>المخاطر وتخفيفها</a:t>
             </a:r>
@@ -3786,6 +3806,8 @@
                   <a:srgbClr val="C9A227"/>
                 </a:solidFill>
                 <a:latin typeface="Arial"/>
+                <a:ea typeface="Arial"/>
+                <a:cs typeface="Arial"/>
               </a:rPr>
               <a:t>10</a:t>
             </a:r>
@@ -3827,6 +3849,8 @@
                             <a:srgbClr val="FFFFFF"/>
                           </a:solidFill>
                           <a:latin typeface="Arial"/>
+                          <a:ea typeface="Arial"/>
+                          <a:cs typeface="Arial"/>
                         </a:rPr>
                         <a:t>المخاطرة</a:t>
                       </a:r>
@@ -3850,6 +3874,8 @@
                             <a:srgbClr val="FFFFFF"/>
                           </a:solidFill>
                           <a:latin typeface="Arial"/>
+                          <a:ea typeface="Arial"/>
+                          <a:cs typeface="Arial"/>
                         </a:rPr>
                         <a:t>إجراء التخفيف</a:t>
                       </a:r>
@@ -3875,6 +3901,8 @@
                             <a:srgbClr val="2C2C2C"/>
                           </a:solidFill>
                           <a:latin typeface="Arial"/>
+                          <a:ea typeface="Arial"/>
+                          <a:cs typeface="Arial"/>
                         </a:rPr>
                         <a:t>المنافسة</a:t>
                       </a:r>
@@ -3898,6 +3926,8 @@
                             <a:srgbClr val="2C2C2C"/>
                           </a:solidFill>
                           <a:latin typeface="Arial"/>
+                          <a:ea typeface="Arial"/>
+                          <a:cs typeface="Arial"/>
                         </a:rPr>
                         <a:t>تموضع بوتيكي + ولاء للعلامة لا للسعر</a:t>
                       </a:r>
@@ -3923,6 +3953,8 @@
                             <a:srgbClr val="2C2C2C"/>
                           </a:solidFill>
                           <a:latin typeface="Arial"/>
+                          <a:ea typeface="Arial"/>
+                          <a:cs typeface="Arial"/>
                         </a:rPr>
                         <a:t>انخفاض الإشغال</a:t>
                       </a:r>
@@ -3946,6 +3978,8 @@
                             <a:srgbClr val="2C2C2C"/>
                           </a:solidFill>
                           <a:latin typeface="Arial"/>
+                          <a:ea typeface="Arial"/>
+                          <a:cs typeface="Arial"/>
                         </a:rPr>
                         <a:t>نقطة تعادل منخفضة (37%) + إحالات + باقات</a:t>
                       </a:r>
@@ -3971,6 +4005,8 @@
                             <a:srgbClr val="2C2C2C"/>
                           </a:solidFill>
                           <a:latin typeface="Arial"/>
+                          <a:ea typeface="Arial"/>
+                          <a:cs typeface="Arial"/>
                         </a:rPr>
                         <a:t>الاعتماد على مدربة</a:t>
                       </a:r>
@@ -3994,6 +4030,8 @@
                             <a:srgbClr val="2C2C2C"/>
                           </a:solidFill>
                           <a:latin typeface="Arial"/>
+                          <a:ea typeface="Arial"/>
+                          <a:cs typeface="Arial"/>
                         </a:rPr>
                         <a:t>تعدد المدربات + توثيق المنهجية + بناء علامة</a:t>
                       </a:r>
@@ -4019,6 +4057,8 @@
                             <a:srgbClr val="2C2C2C"/>
                           </a:solidFill>
                           <a:latin typeface="Arial"/>
+                          <a:ea typeface="Arial"/>
+                          <a:cs typeface="Arial"/>
                         </a:rPr>
                         <a:t>ارتفاع الإيجار</a:t>
                       </a:r>
@@ -4042,6 +4082,8 @@
                             <a:srgbClr val="2C2C2C"/>
                           </a:solidFill>
                           <a:latin typeface="Arial"/>
+                          <a:ea typeface="Arial"/>
+                          <a:cs typeface="Arial"/>
                         </a:rPr>
                         <a:t>عقد طويل بسقف زيادة متفق عليه</a:t>
                       </a:r>
@@ -4197,6 +4239,8 @@
                   <a:srgbClr val="FFFFFF"/>
                 </a:solidFill>
                 <a:latin typeface="Arial"/>
+                <a:ea typeface="Arial"/>
+                <a:cs typeface="Arial"/>
               </a:rPr>
               <a:t>الطلب التمويلي</a:t>
             </a:r>
@@ -4236,6 +4280,8 @@
                   <a:srgbClr val="C9A227"/>
                 </a:solidFill>
                 <a:latin typeface="Arial"/>
+                <a:ea typeface="Arial"/>
+                <a:cs typeface="Arial"/>
               </a:rPr>
               <a:t>11</a:t>
             </a:r>
@@ -4275,6 +4321,8 @@
                   <a:srgbClr val="1F4E78"/>
                 </a:solidFill>
                 <a:latin typeface="Arial"/>
+                <a:ea typeface="Arial"/>
+                <a:cs typeface="Arial"/>
               </a:rPr>
               <a:t>التمويل المطلوب: 300,000 ريال (يشمل هامش أمان ~25 ألف)</a:t>
             </a:r>
@@ -4317,6 +4365,8 @@
                   <a:srgbClr val="2C2C2C"/>
                 </a:solidFill>
                 <a:latin typeface="Arial"/>
+                <a:ea typeface="Arial"/>
+                <a:cs typeface="Arial"/>
               </a:rPr>
               <a:t>•  استرداد كامل خلال السنة الثانية.</a:t>
             </a:r>
@@ -4336,6 +4386,8 @@
                   <a:srgbClr val="2C2C2C"/>
                 </a:solidFill>
                 <a:latin typeface="Arial"/>
+                <a:ea typeface="Arial"/>
+                <a:cs typeface="Arial"/>
               </a:rPr>
               <a:t>•  نقطة مراجعة أداء عند الشهر السادس قبل أي قرار توسعة.</a:t>
             </a:r>
@@ -4355,6 +4407,8 @@
                   <a:srgbClr val="2C2C2C"/>
                 </a:solidFill>
                 <a:latin typeface="Arial"/>
+                <a:ea typeface="Arial"/>
+                <a:cs typeface="Arial"/>
               </a:rPr>
               <a:t>•  التوصية: المضي قدماً (GO).</a:t>
             </a:r>
@@ -4438,6 +4492,8 @@
                   <a:srgbClr val="FFFFFF"/>
                 </a:solidFill>
                 <a:latin typeface="Arial"/>
+                <a:ea typeface="Arial"/>
+                <a:cs typeface="Arial"/>
               </a:rPr>
               <a:t>استثمار صغير، نقطة تعادل منخفضة، عائد استثنائي — في سوق صاعد</a:t>
             </a:r>
@@ -4583,6 +4639,8 @@
                   <a:srgbClr val="FFFFFF"/>
                 </a:solidFill>
                 <a:latin typeface="Arial"/>
+                <a:ea typeface="Arial"/>
+                <a:cs typeface="Arial"/>
               </a:rPr>
               <a:t>لماذا الآن؟</a:t>
             </a:r>
@@ -4622,6 +4680,8 @@
                   <a:srgbClr val="C9A227"/>
                 </a:solidFill>
                 <a:latin typeface="Arial"/>
+                <a:ea typeface="Arial"/>
+                <a:cs typeface="Arial"/>
               </a:rPr>
               <a:t>12</a:t>
             </a:r>
@@ -4664,6 +4724,8 @@
                   <a:srgbClr val="2C2C2C"/>
                 </a:solidFill>
                 <a:latin typeface="Arial"/>
+                <a:ea typeface="Arial"/>
+                <a:cs typeface="Arial"/>
               </a:rPr>
               <a:t>•  السوق في ذروة النمو ومدعوم حكومياً (رؤية 2030).</a:t>
             </a:r>
@@ -4683,6 +4745,8 @@
                   <a:srgbClr val="2C2C2C"/>
                 </a:solidFill>
                 <a:latin typeface="Arial"/>
+                <a:ea typeface="Arial"/>
+                <a:cs typeface="Arial"/>
               </a:rPr>
               <a:t>•  شريحة النساء هي الأسرع نمواً وغير مُشبَعة في كثير من الأحياء.</a:t>
             </a:r>
@@ -4702,6 +4766,8 @@
                   <a:srgbClr val="2C2C2C"/>
                 </a:solidFill>
                 <a:latin typeface="Arial"/>
+                <a:ea typeface="Arial"/>
+                <a:cs typeface="Arial"/>
               </a:rPr>
               <a:t>•  رأسمال صغير + عائد داخلي يفوق 65% = نسبة عائد/مخاطرة جذابة جداً.</a:t>
             </a:r>
@@ -4741,6 +4807,8 @@
                   <a:srgbClr val="C9A227"/>
                 </a:solidFill>
                 <a:latin typeface="Arial"/>
+                <a:ea typeface="Arial"/>
+                <a:cs typeface="Arial"/>
               </a:rPr>
               <a:t>« استثمار صغير، نقطة تعادل منخفضة، عائد استثنائي، في سوق صاعد »</a:t>
             </a:r>
@@ -4886,6 +4954,8 @@
                   <a:srgbClr val="FFFFFF"/>
                 </a:solidFill>
                 <a:latin typeface="Arial"/>
+                <a:ea typeface="Arial"/>
+                <a:cs typeface="Arial"/>
               </a:rPr>
               <a:t>الفرصة</a:t>
             </a:r>
@@ -4925,6 +4995,8 @@
                   <a:srgbClr val="C9A227"/>
                 </a:solidFill>
                 <a:latin typeface="Arial"/>
+                <a:ea typeface="Arial"/>
+                <a:cs typeface="Arial"/>
               </a:rPr>
               <a:t>1</a:t>
             </a:r>
@@ -4967,6 +5039,8 @@
                   <a:srgbClr val="2C2C2C"/>
                 </a:solidFill>
                 <a:latin typeface="Arial"/>
+                <a:ea typeface="Arial"/>
+                <a:cs typeface="Arial"/>
               </a:rPr>
               <a:t>•  استوديو بيلاتس نسائي بوتيكي في الرياض — في صميم أسرع شريحتين نمواً بالسوق: النساء + القطاع البوتيكي.</a:t>
             </a:r>
@@ -4986,6 +5060,8 @@
                   <a:srgbClr val="2C2C2C"/>
                 </a:solidFill>
                 <a:latin typeface="Arial"/>
+                <a:ea typeface="Arial"/>
+                <a:cs typeface="Arial"/>
               </a:rPr>
               <a:t>•  سوق اللياقة السعودي: ~1.5 مليار دولار (2025) ← ~3 مليار دولار (2030).</a:t>
             </a:r>
@@ -5005,6 +5081,8 @@
                   <a:srgbClr val="2C2C2C"/>
                 </a:solidFill>
                 <a:latin typeface="Arial"/>
+                <a:ea typeface="Arial"/>
+                <a:cs typeface="Arial"/>
               </a:rPr>
               <a:t>•  نمو القطاع البوتيكي ~13.6% سنوياً | نمو شريحة النساء ~13.25% سنوياً.</a:t>
             </a:r>
@@ -5024,6 +5102,8 @@
                   <a:srgbClr val="2C2C2C"/>
                 </a:solidFill>
                 <a:latin typeface="Arial"/>
+                <a:ea typeface="Arial"/>
+                <a:cs typeface="Arial"/>
               </a:rPr>
               <a:t>•  مدعوم برؤية 2030 (مستهدف 40% ممارسة للنشاط البدني).</a:t>
             </a:r>
@@ -5169,6 +5249,8 @@
                   <a:srgbClr val="FFFFFF"/>
                 </a:solidFill>
                 <a:latin typeface="Arial"/>
+                <a:ea typeface="Arial"/>
+                <a:cs typeface="Arial"/>
               </a:rPr>
               <a:t>المشكلة والفجوة</a:t>
             </a:r>
@@ -5208,6 +5290,8 @@
                   <a:srgbClr val="C9A227"/>
                 </a:solidFill>
                 <a:latin typeface="Arial"/>
+                <a:ea typeface="Arial"/>
+                <a:cs typeface="Arial"/>
               </a:rPr>
               <a:t>2</a:t>
             </a:r>
@@ -5250,6 +5334,8 @@
                   <a:srgbClr val="2C2C2C"/>
                 </a:solidFill>
                 <a:latin typeface="Arial"/>
+                <a:ea typeface="Arial"/>
+                <a:cs typeface="Arial"/>
               </a:rPr>
               <a:t>•  فاخر جداً: حصة بـ 300–375 ريال — حاجز سعري مرتفع.</a:t>
             </a:r>
@@ -5269,6 +5355,8 @@
                   <a:srgbClr val="2C2C2C"/>
                 </a:solidFill>
                 <a:latin typeface="Arial"/>
+                <a:ea typeface="Arial"/>
+                <a:cs typeface="Arial"/>
               </a:rPr>
               <a:t>•  اقتصادي مزدحم: أندية ضخمة تفقد الطابع الحميمي والخصوصية.</a:t>
             </a:r>
@@ -5288,6 +5376,8 @@
                   <a:srgbClr val="2C2C2C"/>
                 </a:solidFill>
                 <a:latin typeface="Arial"/>
+                <a:ea typeface="Arial"/>
+                <a:cs typeface="Arial"/>
               </a:rPr>
               <a:t>•  الفجوة: استوديو بوتيكي راقٍ، نسائي بالكامل، بسعر في المتناول (150 ريال) وتجربة شبه شخصية (6 عميلات كحد أقصى).</a:t>
             </a:r>
@@ -5433,6 +5523,8 @@
                   <a:srgbClr val="FFFFFF"/>
                 </a:solidFill>
                 <a:latin typeface="Arial"/>
+                <a:ea typeface="Arial"/>
+                <a:cs typeface="Arial"/>
               </a:rPr>
               <a:t>الحل</a:t>
             </a:r>
@@ -5472,6 +5564,8 @@
                   <a:srgbClr val="C9A227"/>
                 </a:solidFill>
                 <a:latin typeface="Arial"/>
+                <a:ea typeface="Arial"/>
+                <a:cs typeface="Arial"/>
               </a:rPr>
               <a:t>3</a:t>
             </a:r>
@@ -5514,6 +5608,8 @@
                   <a:srgbClr val="2C2C2C"/>
                 </a:solidFill>
                 <a:latin typeface="Arial"/>
+                <a:ea typeface="Arial"/>
+                <a:cs typeface="Arial"/>
               </a:rPr>
               <a:t>•  استوديو 120 م² بـ 6 أجهزة Reformer (قابلة للتوسعة إلى 8).</a:t>
             </a:r>
@@ -5533,6 +5629,8 @@
                   <a:srgbClr val="2C2C2C"/>
                 </a:solidFill>
                 <a:latin typeface="Arial"/>
+                <a:ea typeface="Arial"/>
+                <a:cs typeface="Arial"/>
               </a:rPr>
               <a:t>•  تجربة حميمية فاخرة وخصوصية نسائية تامة.</a:t>
             </a:r>
@@ -5552,6 +5650,8 @@
                   <a:srgbClr val="2C2C2C"/>
                 </a:solidFill>
                 <a:latin typeface="Arial"/>
+                <a:ea typeface="Arial"/>
+                <a:cs typeface="Arial"/>
               </a:rPr>
               <a:t>•  موقع راقٍ + هوية علامة قوية.</a:t>
             </a:r>
@@ -5571,6 +5671,8 @@
                   <a:srgbClr val="2C2C2C"/>
                 </a:solidFill>
                 <a:latin typeface="Arial"/>
+                <a:ea typeface="Arial"/>
+                <a:cs typeface="Arial"/>
               </a:rPr>
               <a:t>•  نموذج إيرادات متعدد: حصص مفردة + باقات + اشتراكات + حصص خاصة.</a:t>
             </a:r>
@@ -5716,6 +5818,8 @@
                   <a:srgbClr val="FFFFFF"/>
                 </a:solidFill>
                 <a:latin typeface="Arial"/>
+                <a:ea typeface="Arial"/>
+                <a:cs typeface="Arial"/>
               </a:rPr>
               <a:t>السوق المستهدف</a:t>
             </a:r>
@@ -5755,6 +5859,8 @@
                   <a:srgbClr val="C9A227"/>
                 </a:solidFill>
                 <a:latin typeface="Arial"/>
+                <a:ea typeface="Arial"/>
+                <a:cs typeface="Arial"/>
               </a:rPr>
               <a:t>4</a:t>
             </a:r>
@@ -5797,6 +5903,8 @@
                   <a:srgbClr val="2C2C2C"/>
                 </a:solidFill>
                 <a:latin typeface="Arial"/>
+                <a:ea typeface="Arial"/>
+                <a:cs typeface="Arial"/>
               </a:rPr>
               <a:t>•  سيدات 25–45 سنة، دخل متوسط إلى مرتفع.</a:t>
             </a:r>
@@ -5816,6 +5924,8 @@
                   <a:srgbClr val="2C2C2C"/>
                 </a:solidFill>
                 <a:latin typeface="Arial"/>
+                <a:ea typeface="Arial"/>
+                <a:cs typeface="Arial"/>
               </a:rPr>
               <a:t>•  العاملات (الصباح الباكر والمساء) + ربات المنزل (فترات النهار).</a:t>
             </a:r>
@@ -5835,6 +5945,8 @@
                   <a:srgbClr val="2C2C2C"/>
                 </a:solidFill>
                 <a:latin typeface="Arial"/>
+                <a:ea typeface="Arial"/>
+                <a:cs typeface="Arial"/>
               </a:rPr>
               <a:t>•  محرّكات الطلب: الوعي الصحي، نمط الحياة، ما بعد الولادة، التعافي.</a:t>
             </a:r>
@@ -5980,6 +6092,8 @@
                   <a:srgbClr val="FFFFFF"/>
                 </a:solidFill>
                 <a:latin typeface="Arial"/>
+                <a:ea typeface="Arial"/>
+                <a:cs typeface="Arial"/>
               </a:rPr>
               <a:t>نموذج العمل</a:t>
             </a:r>
@@ -6019,6 +6133,8 @@
                   <a:srgbClr val="C9A227"/>
                 </a:solidFill>
                 <a:latin typeface="Arial"/>
+                <a:ea typeface="Arial"/>
+                <a:cs typeface="Arial"/>
               </a:rPr>
               <a:t>5</a:t>
             </a:r>
@@ -6060,6 +6176,8 @@
                             <a:srgbClr val="FFFFFF"/>
                           </a:solidFill>
                           <a:latin typeface="Arial"/>
+                          <a:ea typeface="Arial"/>
+                          <a:cs typeface="Arial"/>
                         </a:rPr>
                         <a:t>المصدر</a:t>
                       </a:r>
@@ -6083,6 +6201,8 @@
                             <a:srgbClr val="FFFFFF"/>
                           </a:solidFill>
                           <a:latin typeface="Arial"/>
+                          <a:ea typeface="Arial"/>
+                          <a:cs typeface="Arial"/>
                         </a:rPr>
                         <a:t>السعر</a:t>
                       </a:r>
@@ -6108,6 +6228,8 @@
                             <a:srgbClr val="2C2C2C"/>
                           </a:solidFill>
                           <a:latin typeface="Arial"/>
+                          <a:ea typeface="Arial"/>
+                          <a:cs typeface="Arial"/>
                         </a:rPr>
                         <a:t>حصة مفردة</a:t>
                       </a:r>
@@ -6131,6 +6253,8 @@
                             <a:srgbClr val="2C2C2C"/>
                           </a:solidFill>
                           <a:latin typeface="Arial"/>
+                          <a:ea typeface="Arial"/>
+                          <a:cs typeface="Arial"/>
                         </a:rPr>
                         <a:t>150 ريال</a:t>
                       </a:r>
@@ -6156,6 +6280,8 @@
                             <a:srgbClr val="2C2C2C"/>
                           </a:solidFill>
                           <a:latin typeface="Arial"/>
+                          <a:ea typeface="Arial"/>
+                          <a:cs typeface="Arial"/>
                         </a:rPr>
                         <a:t>باقة 8 حصص</a:t>
                       </a:r>
@@ -6179,6 +6305,8 @@
                             <a:srgbClr val="2C2C2C"/>
                           </a:solidFill>
                           <a:latin typeface="Arial"/>
+                          <a:ea typeface="Arial"/>
+                          <a:cs typeface="Arial"/>
                         </a:rPr>
                         <a:t>1,000 ريال (125/حصة)</a:t>
                       </a:r>
@@ -6204,6 +6332,8 @@
                             <a:srgbClr val="2C2C2C"/>
                           </a:solidFill>
                           <a:latin typeface="Arial"/>
+                          <a:ea typeface="Arial"/>
+                          <a:cs typeface="Arial"/>
                         </a:rPr>
                         <a:t>اشتراك شهري غير محدود</a:t>
                       </a:r>
@@ -6227,6 +6357,8 @@
                             <a:srgbClr val="2C2C2C"/>
                           </a:solidFill>
                           <a:latin typeface="Arial"/>
+                          <a:ea typeface="Arial"/>
+                          <a:cs typeface="Arial"/>
                         </a:rPr>
                         <a:t>1,600 ريال</a:t>
                       </a:r>
@@ -6252,6 +6384,8 @@
                             <a:srgbClr val="2C2C2C"/>
                           </a:solidFill>
                           <a:latin typeface="Arial"/>
+                          <a:ea typeface="Arial"/>
+                          <a:cs typeface="Arial"/>
                         </a:rPr>
                         <a:t>حصة خاصة (Private/Duet)</a:t>
                       </a:r>
@@ -6275,6 +6409,8 @@
                             <a:srgbClr val="2C2C2C"/>
                           </a:solidFill>
                           <a:latin typeface="Arial"/>
+                          <a:ea typeface="Arial"/>
+                          <a:cs typeface="Arial"/>
                         </a:rPr>
                         <a:t>250–400 ريال</a:t>
                       </a:r>
@@ -6324,6 +6460,8 @@
                   <a:srgbClr val="1F4E78"/>
                 </a:solidFill>
                 <a:latin typeface="Arial"/>
+                <a:ea typeface="Arial"/>
+                <a:cs typeface="Arial"/>
               </a:rPr>
               <a:t>الطاقة: 6 أجهزة × 7 حصص × 26 يوم = 1,092 حصة-عميلة/شهر</a:t>
             </a:r>
@@ -6469,6 +6607,8 @@
                   <a:srgbClr val="FFFFFF"/>
                 </a:solidFill>
                 <a:latin typeface="Arial"/>
+                <a:ea typeface="Arial"/>
+                <a:cs typeface="Arial"/>
               </a:rPr>
               <a:t>الاقتصاديات</a:t>
             </a:r>
@@ -6508,6 +6648,8 @@
                   <a:srgbClr val="C9A227"/>
                 </a:solidFill>
                 <a:latin typeface="Arial"/>
+                <a:ea typeface="Arial"/>
+                <a:cs typeface="Arial"/>
               </a:rPr>
               <a:t>6</a:t>
             </a:r>
@@ -6549,6 +6691,8 @@
                             <a:srgbClr val="FFFFFF"/>
                           </a:solidFill>
                           <a:latin typeface="Arial"/>
+                          <a:ea typeface="Arial"/>
+                          <a:cs typeface="Arial"/>
                         </a:rPr>
                         <a:t>المؤشر</a:t>
                       </a:r>
@@ -6572,6 +6716,8 @@
                             <a:srgbClr val="FFFFFF"/>
                           </a:solidFill>
                           <a:latin typeface="Arial"/>
+                          <a:ea typeface="Arial"/>
+                          <a:cs typeface="Arial"/>
                         </a:rPr>
                         <a:t>القيمة</a:t>
                       </a:r>
@@ -6597,6 +6743,8 @@
                             <a:srgbClr val="2C2C2C"/>
                           </a:solidFill>
                           <a:latin typeface="Arial"/>
+                          <a:ea typeface="Arial"/>
+                          <a:cs typeface="Arial"/>
                         </a:rPr>
                         <a:t>إجمالي الاستثمار</a:t>
                       </a:r>
@@ -6620,6 +6768,8 @@
                             <a:srgbClr val="2C2C2C"/>
                           </a:solidFill>
                           <a:latin typeface="Arial"/>
+                          <a:ea typeface="Arial"/>
+                          <a:cs typeface="Arial"/>
                         </a:rPr>
                         <a:t>275,000 ريال</a:t>
                       </a:r>
@@ -6645,6 +6795,8 @@
                             <a:srgbClr val="2C2C2C"/>
                           </a:solidFill>
                           <a:latin typeface="Arial"/>
+                          <a:ea typeface="Arial"/>
+                          <a:cs typeface="Arial"/>
                         </a:rPr>
                         <a:t>تكلفة تشغيل شهرية</a:t>
                       </a:r>
@@ -6668,6 +6820,8 @@
                             <a:srgbClr val="2C2C2C"/>
                           </a:solidFill>
                           <a:latin typeface="Arial"/>
+                          <a:ea typeface="Arial"/>
+                          <a:cs typeface="Arial"/>
                         </a:rPr>
                         <a:t>61,000 ريال</a:t>
                       </a:r>
@@ -6693,6 +6847,8 @@
                             <a:srgbClr val="2C2C2C"/>
                           </a:solidFill>
                           <a:latin typeface="Arial"/>
+                          <a:ea typeface="Arial"/>
+                          <a:cs typeface="Arial"/>
                         </a:rPr>
                         <a:t>نقطة التعادل</a:t>
                       </a:r>
@@ -6716,6 +6872,8 @@
                             <a:srgbClr val="2C2C2C"/>
                           </a:solidFill>
                           <a:latin typeface="Arial"/>
+                          <a:ea typeface="Arial"/>
+                          <a:cs typeface="Arial"/>
                         </a:rPr>
                         <a:t>37% إشغال فقط (~2.2 عميلة/حصة)</a:t>
                       </a:r>
@@ -6765,6 +6923,8 @@
                   <a:srgbClr val="2E8B8B"/>
                 </a:solidFill>
                 <a:latin typeface="Arial"/>
+                <a:ea typeface="Arial"/>
+                <a:cs typeface="Arial"/>
               </a:rPr>
               <a:t>رأسمال منخفض + نقطة تعادل منخفضة = مخاطرة تشغيلية محدودة</a:t>
             </a:r>
@@ -6910,6 +7070,8 @@
                   <a:srgbClr val="FFFFFF"/>
                 </a:solidFill>
                 <a:latin typeface="Arial"/>
+                <a:ea typeface="Arial"/>
+                <a:cs typeface="Arial"/>
               </a:rPr>
               <a:t>التوقعات المالية (سيناريوهات الإشغال)</a:t>
             </a:r>
@@ -6949,6 +7111,8 @@
                   <a:srgbClr val="C9A227"/>
                 </a:solidFill>
                 <a:latin typeface="Arial"/>
+                <a:ea typeface="Arial"/>
+                <a:cs typeface="Arial"/>
               </a:rPr>
               <a:t>7</a:t>
             </a:r>
@@ -6992,6 +7156,8 @@
                             <a:srgbClr val="FFFFFF"/>
                           </a:solidFill>
                           <a:latin typeface="Arial"/>
+                          <a:ea typeface="Arial"/>
+                          <a:cs typeface="Arial"/>
                         </a:rPr>
                         <a:t>السيناريو</a:t>
                       </a:r>
@@ -7015,6 +7181,8 @@
                             <a:srgbClr val="FFFFFF"/>
                           </a:solidFill>
                           <a:latin typeface="Arial"/>
+                          <a:ea typeface="Arial"/>
+                          <a:cs typeface="Arial"/>
                         </a:rPr>
                         <a:t>الإيراد الشهري</a:t>
                       </a:r>
@@ -7038,6 +7206,8 @@
                             <a:srgbClr val="FFFFFF"/>
                           </a:solidFill>
                           <a:latin typeface="Arial"/>
+                          <a:ea typeface="Arial"/>
+                          <a:cs typeface="Arial"/>
                         </a:rPr>
                         <a:t>صافي شهري</a:t>
                       </a:r>
@@ -7061,6 +7231,8 @@
                             <a:srgbClr val="FFFFFF"/>
                           </a:solidFill>
                           <a:latin typeface="Arial"/>
+                          <a:ea typeface="Arial"/>
+                          <a:cs typeface="Arial"/>
                         </a:rPr>
                         <a:t>صافي سنوي</a:t>
                       </a:r>
@@ -7086,6 +7258,8 @@
                             <a:srgbClr val="2C2C2C"/>
                           </a:solidFill>
                           <a:latin typeface="Arial"/>
+                          <a:ea typeface="Arial"/>
+                          <a:cs typeface="Arial"/>
                         </a:rPr>
                         <a:t>إشغال 30%</a:t>
                       </a:r>
@@ -7109,6 +7283,8 @@
                             <a:srgbClr val="2C2C2C"/>
                           </a:solidFill>
                           <a:latin typeface="Arial"/>
+                          <a:ea typeface="Arial"/>
+                          <a:cs typeface="Arial"/>
                         </a:rPr>
                         <a:t>49,140</a:t>
                       </a:r>
@@ -7132,6 +7308,8 @@
                             <a:srgbClr val="2C2C2C"/>
                           </a:solidFill>
                           <a:latin typeface="Arial"/>
+                          <a:ea typeface="Arial"/>
+                          <a:cs typeface="Arial"/>
                         </a:rPr>
                         <a:t>(11,860)</a:t>
                       </a:r>
@@ -7155,6 +7333,8 @@
                             <a:srgbClr val="2C2C2C"/>
                           </a:solidFill>
                           <a:latin typeface="Arial"/>
+                          <a:ea typeface="Arial"/>
+                          <a:cs typeface="Arial"/>
                         </a:rPr>
                         <a:t>(142,320)</a:t>
                       </a:r>
@@ -7180,6 +7360,8 @@
                             <a:srgbClr val="2C2C2C"/>
                           </a:solidFill>
                           <a:latin typeface="Arial"/>
+                          <a:ea typeface="Arial"/>
+                          <a:cs typeface="Arial"/>
                         </a:rPr>
                         <a:t>إشغال 50%</a:t>
                       </a:r>
@@ -7203,6 +7385,8 @@
                             <a:srgbClr val="2C2C2C"/>
                           </a:solidFill>
                           <a:latin typeface="Arial"/>
+                          <a:ea typeface="Arial"/>
+                          <a:cs typeface="Arial"/>
                         </a:rPr>
                         <a:t>81,900</a:t>
                       </a:r>
@@ -7226,6 +7410,8 @@
                             <a:srgbClr val="2C2C2C"/>
                           </a:solidFill>
                           <a:latin typeface="Arial"/>
+                          <a:ea typeface="Arial"/>
+                          <a:cs typeface="Arial"/>
                         </a:rPr>
                         <a:t>20,900</a:t>
                       </a:r>
@@ -7249,6 +7435,8 @@
                             <a:srgbClr val="2C2C2C"/>
                           </a:solidFill>
                           <a:latin typeface="Arial"/>
+                          <a:ea typeface="Arial"/>
+                          <a:cs typeface="Arial"/>
                         </a:rPr>
                         <a:t>250,800</a:t>
                       </a:r>
@@ -7274,6 +7462,8 @@
                             <a:srgbClr val="2C2C2C"/>
                           </a:solidFill>
                           <a:latin typeface="Arial"/>
+                          <a:ea typeface="Arial"/>
+                          <a:cs typeface="Arial"/>
                         </a:rPr>
                         <a:t>إشغال 70%</a:t>
                       </a:r>
@@ -7297,6 +7487,8 @@
                             <a:srgbClr val="2C2C2C"/>
                           </a:solidFill>
                           <a:latin typeface="Arial"/>
+                          <a:ea typeface="Arial"/>
+                          <a:cs typeface="Arial"/>
                         </a:rPr>
                         <a:t>114,660</a:t>
                       </a:r>
@@ -7320,6 +7512,8 @@
                             <a:srgbClr val="2C2C2C"/>
                           </a:solidFill>
                           <a:latin typeface="Arial"/>
+                          <a:ea typeface="Arial"/>
+                          <a:cs typeface="Arial"/>
                         </a:rPr>
                         <a:t>53,660</a:t>
                       </a:r>
@@ -7343,6 +7537,8 @@
                             <a:srgbClr val="2C2C2C"/>
                           </a:solidFill>
                           <a:latin typeface="Arial"/>
+                          <a:ea typeface="Arial"/>
+                          <a:cs typeface="Arial"/>
                         </a:rPr>
                         <a:t>643,920</a:t>
                       </a:r>
@@ -7368,6 +7564,8 @@
                             <a:srgbClr val="2C2C2C"/>
                           </a:solidFill>
                           <a:latin typeface="Arial"/>
+                          <a:ea typeface="Arial"/>
+                          <a:cs typeface="Arial"/>
                         </a:rPr>
                         <a:t>إشغال 90%</a:t>
                       </a:r>
@@ -7391,6 +7589,8 @@
                             <a:srgbClr val="2C2C2C"/>
                           </a:solidFill>
                           <a:latin typeface="Arial"/>
+                          <a:ea typeface="Arial"/>
+                          <a:cs typeface="Arial"/>
                         </a:rPr>
                         <a:t>147,420</a:t>
                       </a:r>
@@ -7414,6 +7614,8 @@
                             <a:srgbClr val="2C2C2C"/>
                           </a:solidFill>
                           <a:latin typeface="Arial"/>
+                          <a:ea typeface="Arial"/>
+                          <a:cs typeface="Arial"/>
                         </a:rPr>
                         <a:t>86,420</a:t>
                       </a:r>
@@ -7437,6 +7639,8 @@
                             <a:srgbClr val="2C2C2C"/>
                           </a:solidFill>
                           <a:latin typeface="Arial"/>
+                          <a:ea typeface="Arial"/>
+                          <a:cs typeface="Arial"/>
                         </a:rPr>
                         <a:t>1,037,040</a:t>
                       </a:r>
@@ -7592,6 +7796,8 @@
                   <a:srgbClr val="FFFFFF"/>
                 </a:solidFill>
                 <a:latin typeface="Arial"/>
+                <a:ea typeface="Arial"/>
+                <a:cs typeface="Arial"/>
               </a:rPr>
               <a:t>مؤشرات العائد</a:t>
             </a:r>
@@ -7631,6 +7837,8 @@
                   <a:srgbClr val="C9A227"/>
                 </a:solidFill>
                 <a:latin typeface="Arial"/>
+                <a:ea typeface="Arial"/>
+                <a:cs typeface="Arial"/>
               </a:rPr>
               <a:t>8</a:t>
             </a:r>
@@ -7672,6 +7880,8 @@
                             <a:srgbClr val="FFFFFF"/>
                           </a:solidFill>
                           <a:latin typeface="Arial"/>
+                          <a:ea typeface="Arial"/>
+                          <a:cs typeface="Arial"/>
                         </a:rPr>
                         <a:t>المؤشر</a:t>
                       </a:r>
@@ -7695,6 +7905,8 @@
                             <a:srgbClr val="FFFFFF"/>
                           </a:solidFill>
                           <a:latin typeface="Arial"/>
+                          <a:ea typeface="Arial"/>
+                          <a:cs typeface="Arial"/>
                         </a:rPr>
                         <a:t>القيمة</a:t>
                       </a:r>
@@ -7720,6 +7932,8 @@
                             <a:srgbClr val="2C2C2C"/>
                           </a:solidFill>
                           <a:latin typeface="Arial"/>
+                          <a:ea typeface="Arial"/>
+                          <a:cs typeface="Arial"/>
                         </a:rPr>
                         <a:t>NPV (5 سنوات @15%)</a:t>
                       </a:r>
@@ -7743,6 +7957,8 @@
                             <a:srgbClr val="2C2C2C"/>
                           </a:solidFill>
                           <a:latin typeface="Arial"/>
+                          <a:ea typeface="Arial"/>
+                          <a:cs typeface="Arial"/>
                         </a:rPr>
                         <a:t>~ +653,000 ريال</a:t>
                       </a:r>
@@ -7768,6 +7984,8 @@
                             <a:srgbClr val="2C2C2C"/>
                           </a:solidFill>
                           <a:latin typeface="Arial"/>
+                          <a:ea typeface="Arial"/>
+                          <a:cs typeface="Arial"/>
                         </a:rPr>
                         <a:t>IRR (معدل العائد الداخلي)</a:t>
                       </a:r>
@@ -7791,6 +8009,8 @@
                             <a:srgbClr val="2C2C2C"/>
                           </a:solidFill>
                           <a:latin typeface="Arial"/>
+                          <a:ea typeface="Arial"/>
+                          <a:cs typeface="Arial"/>
                         </a:rPr>
                         <a:t>~ 66%</a:t>
                       </a:r>
@@ -7816,6 +8036,8 @@
                             <a:srgbClr val="2C2C2C"/>
                           </a:solidFill>
                           <a:latin typeface="Arial"/>
+                          <a:ea typeface="Arial"/>
+                          <a:cs typeface="Arial"/>
                         </a:rPr>
                         <a:t>ROI (إشغال 50%)</a:t>
                       </a:r>
@@ -7839,6 +8061,8 @@
                             <a:srgbClr val="2C2C2C"/>
                           </a:solidFill>
                           <a:latin typeface="Arial"/>
+                          <a:ea typeface="Arial"/>
+                          <a:cs typeface="Arial"/>
                         </a:rPr>
                         <a:t>~ 91% سنوياً</a:t>
                       </a:r>
@@ -7864,6 +8088,8 @@
                             <a:srgbClr val="2C2C2C"/>
                           </a:solidFill>
                           <a:latin typeface="Arial"/>
+                          <a:ea typeface="Arial"/>
+                          <a:cs typeface="Arial"/>
                         </a:rPr>
                         <a:t>فترة الاسترداد</a:t>
                       </a:r>
@@ -7887,6 +8113,8 @@
                             <a:srgbClr val="2C2C2C"/>
                           </a:solidFill>
                           <a:latin typeface="Arial"/>
+                          <a:ea typeface="Arial"/>
+                          <a:cs typeface="Arial"/>
                         </a:rPr>
                         <a:t>~ 13 شهر</a:t>
                       </a:r>
@@ -7912,6 +8140,8 @@
                             <a:srgbClr val="2C2C2C"/>
                           </a:solidFill>
                           <a:latin typeface="Arial"/>
+                          <a:ea typeface="Arial"/>
+                          <a:cs typeface="Arial"/>
                         </a:rPr>
                         <a:t>أرباح أول 3 سنوات</a:t>
                       </a:r>
@@ -7935,6 +8165,8 @@
                             <a:srgbClr val="2C2C2C"/>
                           </a:solidFill>
                           <a:latin typeface="Arial"/>
+                          <a:ea typeface="Arial"/>
+                          <a:cs typeface="Arial"/>
                         </a:rPr>
                         <a:t>~ 666,000 ريال</a:t>
                       </a:r>

--- a/exports/عرض-المستثمر-بيلاتس.pptx
+++ b/exports/عرض-المستثمر-بيلاتس.pptx
@@ -8168,7 +8168,7 @@
                           <a:ea typeface="Arial"/>
                           <a:cs typeface="Arial"/>
                         </a:rPr>
-                        <a:t>~ 666,000 ريال</a:t>
+                        <a:t>~ 665,000 ريال</a:t>
                       </a:r>
                     </a:p>
                   </a:txBody>

--- a/exports/عرض-المستثمر-بيلاتس.pptx
+++ b/exports/عرض-المستثمر-بيلاتس.pptx
@@ -18,6 +18,7 @@
     <p:sldId id="266" r:id="rId17"/>
     <p:sldId id="267" r:id="rId18"/>
     <p:sldId id="268" r:id="rId19"/>
+    <p:sldId id="269" r:id="rId20"/>
   </p:sldIdLst>
   <p:sldSz cx="12191695" cy="6858000" type="screen4x3"/>
   <p:notesSz cx="6858000" cy="9144000"/>
@@ -3494,7 +3495,7 @@
                 <a:ea typeface="Arial"/>
                 <a:cs typeface="Arial"/>
               </a:rPr>
-              <a:t>خطة النمو</a:t>
+              <a:t>تحليل الحساسية ومتانة النموذج</a:t>
             </a:r>
           </a:p>
         </p:txBody>
@@ -3540,16 +3541,553 @@
           </a:p>
         </p:txBody>
       </p:sp>
-      <p:sp>
-        <p:nvSpPr>
-          <p:cNvPr id="6" name="TextBox 5"/>
+      <p:graphicFrame>
+        <p:nvGraphicFramePr>
+          <p:cNvPr id="6" name="Table 5"/>
+          <p:cNvGraphicFramePr>
+            <a:graphicFrameLocks noGrp="1"/>
+          </p:cNvGraphicFramePr>
+          <p:nvPr/>
+        </p:nvGraphicFramePr>
+        <p:xfrm>
+          <a:off x="822960" y="1463040"/>
+          <a:ext cx="10515600" cy="2377440"/>
+        </p:xfrm>
+        <a:graphic>
+          <a:graphicData uri="http://schemas.openxmlformats.org/drawingml/2006/table">
+            <a:tbl>
+              <a:tblPr firstRow="1" bandRow="1">
+                <a:tableStyleId>{5C22544A-7EE6-4342-B048-85BDC9FD1C3A}</a:tableStyleId>
+              </a:tblPr>
+              <a:tblGrid>
+                <a:gridCol w="2103120"/>
+                <a:gridCol w="2103120"/>
+                <a:gridCol w="2103120"/>
+                <a:gridCol w="2103120"/>
+                <a:gridCol w="2103120"/>
+              </a:tblGrid>
+              <a:tr h="594360">
+                <a:tc>
+                  <a:txBody>
+                    <a:bodyPr wrap="square"/>
+                    <a:lstStyle/>
+                    <a:p>
+                      <a:pPr algn="ctr" rtl="1"/>
+                      <a:r>
+                        <a:rPr sz="1500" b="1">
+                          <a:solidFill>
+                            <a:srgbClr val="FFFFFF"/>
+                          </a:solidFill>
+                          <a:latin typeface="Arial"/>
+                          <a:ea typeface="Arial"/>
+                          <a:cs typeface="Arial"/>
+                        </a:rPr>
+                        <a:t>الحالة</a:t>
+                      </a:r>
+                    </a:p>
+                  </a:txBody>
+                  <a:tcPr anchor="ctr" marT="38100" marB="38100" marL="76200" marR="76200">
+                    <a:solidFill>
+                      <a:srgbClr val="2E8B8B"/>
+                    </a:solidFill>
+                  </a:tcPr>
+                </a:tc>
+                <a:tc>
+                  <a:txBody>
+                    <a:bodyPr wrap="square"/>
+                    <a:lstStyle/>
+                    <a:p>
+                      <a:pPr algn="ctr" rtl="1"/>
+                      <a:r>
+                        <a:rPr sz="1500" b="1">
+                          <a:solidFill>
+                            <a:srgbClr val="FFFFFF"/>
+                          </a:solidFill>
+                          <a:latin typeface="Arial"/>
+                          <a:ea typeface="Arial"/>
+                          <a:cs typeface="Arial"/>
+                        </a:rPr>
+                        <a:t>التعادل</a:t>
+                      </a:r>
+                    </a:p>
+                  </a:txBody>
+                  <a:tcPr anchor="ctr" marT="38100" marB="38100" marL="76200" marR="76200">
+                    <a:solidFill>
+                      <a:srgbClr val="2E8B8B"/>
+                    </a:solidFill>
+                  </a:tcPr>
+                </a:tc>
+                <a:tc>
+                  <a:txBody>
+                    <a:bodyPr wrap="square"/>
+                    <a:lstStyle/>
+                    <a:p>
+                      <a:pPr algn="ctr" rtl="1"/>
+                      <a:r>
+                        <a:rPr sz="1500" b="1">
+                          <a:solidFill>
+                            <a:srgbClr val="FFFFFF"/>
+                          </a:solidFill>
+                          <a:latin typeface="Arial"/>
+                          <a:ea typeface="Arial"/>
+                          <a:cs typeface="Arial"/>
+                        </a:rPr>
+                        <a:t>صافي 50%/شهر</a:t>
+                      </a:r>
+                    </a:p>
+                  </a:txBody>
+                  <a:tcPr anchor="ctr" marT="38100" marB="38100" marL="76200" marR="76200">
+                    <a:solidFill>
+                      <a:srgbClr val="2E8B8B"/>
+                    </a:solidFill>
+                  </a:tcPr>
+                </a:tc>
+                <a:tc>
+                  <a:txBody>
+                    <a:bodyPr wrap="square"/>
+                    <a:lstStyle/>
+                    <a:p>
+                      <a:pPr algn="ctr" rtl="1"/>
+                      <a:r>
+                        <a:rPr sz="1500" b="1">
+                          <a:solidFill>
+                            <a:srgbClr val="FFFFFF"/>
+                          </a:solidFill>
+                          <a:latin typeface="Arial"/>
+                          <a:ea typeface="Arial"/>
+                          <a:cs typeface="Arial"/>
+                        </a:rPr>
+                        <a:t>NPV@15%</a:t>
+                      </a:r>
+                    </a:p>
+                  </a:txBody>
+                  <a:tcPr anchor="ctr" marT="38100" marB="38100" marL="76200" marR="76200">
+                    <a:solidFill>
+                      <a:srgbClr val="2E8B8B"/>
+                    </a:solidFill>
+                  </a:tcPr>
+                </a:tc>
+                <a:tc>
+                  <a:txBody>
+                    <a:bodyPr wrap="square"/>
+                    <a:lstStyle/>
+                    <a:p>
+                      <a:pPr algn="ctr" rtl="1"/>
+                      <a:r>
+                        <a:rPr sz="1500" b="1">
+                          <a:solidFill>
+                            <a:srgbClr val="FFFFFF"/>
+                          </a:solidFill>
+                          <a:latin typeface="Arial"/>
+                          <a:ea typeface="Arial"/>
+                          <a:cs typeface="Arial"/>
+                        </a:rPr>
+                        <a:t>IRR</a:t>
+                      </a:r>
+                    </a:p>
+                  </a:txBody>
+                  <a:tcPr anchor="ctr" marT="38100" marB="38100" marL="76200" marR="76200">
+                    <a:solidFill>
+                      <a:srgbClr val="2E8B8B"/>
+                    </a:solidFill>
+                  </a:tcPr>
+                </a:tc>
+              </a:tr>
+              <a:tr h="594360">
+                <a:tc>
+                  <a:txBody>
+                    <a:bodyPr wrap="square"/>
+                    <a:lstStyle/>
+                    <a:p>
+                      <a:pPr algn="ctr" rtl="1"/>
+                      <a:r>
+                        <a:rPr sz="1500" b="1">
+                          <a:solidFill>
+                            <a:srgbClr val="2C2C2C"/>
+                          </a:solidFill>
+                          <a:latin typeface="Arial"/>
+                          <a:ea typeface="Arial"/>
+                          <a:cs typeface="Arial"/>
+                        </a:rPr>
+                        <a:t>أ) الأساسي (سعر صافٍ 150)</a:t>
+                      </a:r>
+                    </a:p>
+                  </a:txBody>
+                  <a:tcPr anchor="ctr" marT="38100" marB="38100" marL="76200" marR="76200">
+                    <a:solidFill>
+                      <a:srgbClr val="C6EFCE"/>
+                    </a:solidFill>
+                  </a:tcPr>
+                </a:tc>
+                <a:tc>
+                  <a:txBody>
+                    <a:bodyPr wrap="square"/>
+                    <a:lstStyle/>
+                    <a:p>
+                      <a:pPr algn="ctr" rtl="1"/>
+                      <a:r>
+                        <a:rPr sz="1500" b="0">
+                          <a:solidFill>
+                            <a:srgbClr val="2C2C2C"/>
+                          </a:solidFill>
+                          <a:latin typeface="Arial"/>
+                          <a:ea typeface="Arial"/>
+                          <a:cs typeface="Arial"/>
+                        </a:rPr>
+                        <a:t>37%</a:t>
+                      </a:r>
+                    </a:p>
+                  </a:txBody>
+                  <a:tcPr anchor="ctr" marT="38100" marB="38100" marL="76200" marR="76200">
+                    <a:solidFill>
+                      <a:srgbClr val="C6EFCE"/>
+                    </a:solidFill>
+                  </a:tcPr>
+                </a:tc>
+                <a:tc>
+                  <a:txBody>
+                    <a:bodyPr wrap="square"/>
+                    <a:lstStyle/>
+                    <a:p>
+                      <a:pPr algn="ctr" rtl="1"/>
+                      <a:r>
+                        <a:rPr sz="1500" b="0">
+                          <a:solidFill>
+                            <a:srgbClr val="2C2C2C"/>
+                          </a:solidFill>
+                          <a:latin typeface="Arial"/>
+                          <a:ea typeface="Arial"/>
+                          <a:cs typeface="Arial"/>
+                        </a:rPr>
+                        <a:t>20,900</a:t>
+                      </a:r>
+                    </a:p>
+                  </a:txBody>
+                  <a:tcPr anchor="ctr" marT="38100" marB="38100" marL="76200" marR="76200">
+                    <a:solidFill>
+                      <a:srgbClr val="C6EFCE"/>
+                    </a:solidFill>
+                  </a:tcPr>
+                </a:tc>
+                <a:tc>
+                  <a:txBody>
+                    <a:bodyPr wrap="square"/>
+                    <a:lstStyle/>
+                    <a:p>
+                      <a:pPr algn="ctr" rtl="1"/>
+                      <a:r>
+                        <a:rPr sz="1500" b="0">
+                          <a:solidFill>
+                            <a:srgbClr val="2C2C2C"/>
+                          </a:solidFill>
+                          <a:latin typeface="Arial"/>
+                          <a:ea typeface="Arial"/>
+                          <a:cs typeface="Arial"/>
+                        </a:rPr>
+                        <a:t>~653,000</a:t>
+                      </a:r>
+                    </a:p>
+                  </a:txBody>
+                  <a:tcPr anchor="ctr" marT="38100" marB="38100" marL="76200" marR="76200">
+                    <a:solidFill>
+                      <a:srgbClr val="C6EFCE"/>
+                    </a:solidFill>
+                  </a:tcPr>
+                </a:tc>
+                <a:tc>
+                  <a:txBody>
+                    <a:bodyPr wrap="square"/>
+                    <a:lstStyle/>
+                    <a:p>
+                      <a:pPr algn="ctr" rtl="1"/>
+                      <a:r>
+                        <a:rPr sz="1500" b="0">
+                          <a:solidFill>
+                            <a:srgbClr val="2C2C2C"/>
+                          </a:solidFill>
+                          <a:latin typeface="Arial"/>
+                          <a:ea typeface="Arial"/>
+                          <a:cs typeface="Arial"/>
+                        </a:rPr>
+                        <a:t>66%</a:t>
+                      </a:r>
+                    </a:p>
+                  </a:txBody>
+                  <a:tcPr anchor="ctr" marT="38100" marB="38100" marL="76200" marR="76200">
+                    <a:solidFill>
+                      <a:srgbClr val="C6EFCE"/>
+                    </a:solidFill>
+                  </a:tcPr>
+                </a:tc>
+              </a:tr>
+              <a:tr h="594360">
+                <a:tc>
+                  <a:txBody>
+                    <a:bodyPr wrap="square"/>
+                    <a:lstStyle/>
+                    <a:p>
+                      <a:pPr algn="ctr" rtl="1"/>
+                      <a:r>
+                        <a:rPr sz="1500" b="1">
+                          <a:solidFill>
+                            <a:srgbClr val="2C2C2C"/>
+                          </a:solidFill>
+                          <a:latin typeface="Arial"/>
+                          <a:ea typeface="Arial"/>
+                          <a:cs typeface="Arial"/>
+                        </a:rPr>
+                        <a:t>ب) + رسوم دفع + إهلاك</a:t>
+                      </a:r>
+                    </a:p>
+                  </a:txBody>
+                  <a:tcPr anchor="ctr" marT="38100" marB="38100" marL="76200" marR="76200">
+                    <a:solidFill>
+                      <a:srgbClr val="F0F3F8"/>
+                    </a:solidFill>
+                  </a:tcPr>
+                </a:tc>
+                <a:tc>
+                  <a:txBody>
+                    <a:bodyPr wrap="square"/>
+                    <a:lstStyle/>
+                    <a:p>
+                      <a:pPr algn="ctr" rtl="1"/>
+                      <a:r>
+                        <a:rPr sz="1500" b="0">
+                          <a:solidFill>
+                            <a:srgbClr val="2C2C2C"/>
+                          </a:solidFill>
+                          <a:latin typeface="Arial"/>
+                          <a:ea typeface="Arial"/>
+                          <a:cs typeface="Arial"/>
+                        </a:rPr>
+                        <a:t>38%</a:t>
+                      </a:r>
+                    </a:p>
+                  </a:txBody>
+                  <a:tcPr anchor="ctr" marT="38100" marB="38100" marL="76200" marR="76200">
+                    <a:solidFill>
+                      <a:srgbClr val="F0F3F8"/>
+                    </a:solidFill>
+                  </a:tcPr>
+                </a:tc>
+                <a:tc>
+                  <a:txBody>
+                    <a:bodyPr wrap="square"/>
+                    <a:lstStyle/>
+                    <a:p>
+                      <a:pPr algn="ctr" rtl="1"/>
+                      <a:r>
+                        <a:rPr sz="1500" b="0">
+                          <a:solidFill>
+                            <a:srgbClr val="2C2C2C"/>
+                          </a:solidFill>
+                          <a:latin typeface="Arial"/>
+                          <a:ea typeface="Arial"/>
+                          <a:cs typeface="Arial"/>
+                        </a:rPr>
+                        <a:t>18,970</a:t>
+                      </a:r>
+                    </a:p>
+                  </a:txBody>
+                  <a:tcPr anchor="ctr" marT="38100" marB="38100" marL="76200" marR="76200">
+                    <a:solidFill>
+                      <a:srgbClr val="F0F3F8"/>
+                    </a:solidFill>
+                  </a:tcPr>
+                </a:tc>
+                <a:tc>
+                  <a:txBody>
+                    <a:bodyPr wrap="square"/>
+                    <a:lstStyle/>
+                    <a:p>
+                      <a:pPr algn="ctr" rtl="1"/>
+                      <a:r>
+                        <a:rPr sz="1500" b="0">
+                          <a:solidFill>
+                            <a:srgbClr val="2C2C2C"/>
+                          </a:solidFill>
+                          <a:latin typeface="Arial"/>
+                          <a:ea typeface="Arial"/>
+                          <a:cs typeface="Arial"/>
+                        </a:rPr>
+                        <a:t>~568,000</a:t>
+                      </a:r>
+                    </a:p>
+                  </a:txBody>
+                  <a:tcPr anchor="ctr" marT="38100" marB="38100" marL="76200" marR="76200">
+                    <a:solidFill>
+                      <a:srgbClr val="F0F3F8"/>
+                    </a:solidFill>
+                  </a:tcPr>
+                </a:tc>
+                <a:tc>
+                  <a:txBody>
+                    <a:bodyPr wrap="square"/>
+                    <a:lstStyle/>
+                    <a:p>
+                      <a:pPr algn="ctr" rtl="1"/>
+                      <a:r>
+                        <a:rPr sz="1500" b="0">
+                          <a:solidFill>
+                            <a:srgbClr val="2C2C2C"/>
+                          </a:solidFill>
+                          <a:latin typeface="Arial"/>
+                          <a:ea typeface="Arial"/>
+                          <a:cs typeface="Arial"/>
+                        </a:rPr>
+                        <a:t>60%</a:t>
+                      </a:r>
+                    </a:p>
+                  </a:txBody>
+                  <a:tcPr anchor="ctr" marT="38100" marB="38100" marL="76200" marR="76200">
+                    <a:solidFill>
+                      <a:srgbClr val="F0F3F8"/>
+                    </a:solidFill>
+                  </a:tcPr>
+                </a:tc>
+              </a:tr>
+              <a:tr h="594360">
+                <a:tc>
+                  <a:txBody>
+                    <a:bodyPr wrap="square"/>
+                    <a:lstStyle/>
+                    <a:p>
+                      <a:pPr algn="ctr" rtl="1"/>
+                      <a:r>
+                        <a:rPr sz="1500" b="1">
+                          <a:solidFill>
+                            <a:srgbClr val="2C2C2C"/>
+                          </a:solidFill>
+                          <a:latin typeface="Arial"/>
+                          <a:ea typeface="Arial"/>
+                          <a:cs typeface="Arial"/>
+                        </a:rPr>
+                        <a:t>ج) الأكثر تحفظاً (شامل الضريبة)</a:t>
+                      </a:r>
+                    </a:p>
+                  </a:txBody>
+                  <a:tcPr anchor="ctr" marT="38100" marB="38100" marL="76200" marR="76200">
+                    <a:solidFill>
+                      <a:srgbClr val="FFFFFF"/>
+                    </a:solidFill>
+                  </a:tcPr>
+                </a:tc>
+                <a:tc>
+                  <a:txBody>
+                    <a:bodyPr wrap="square"/>
+                    <a:lstStyle/>
+                    <a:p>
+                      <a:pPr algn="ctr" rtl="1"/>
+                      <a:r>
+                        <a:rPr sz="1500" b="0">
+                          <a:solidFill>
+                            <a:srgbClr val="2C2C2C"/>
+                          </a:solidFill>
+                          <a:latin typeface="Arial"/>
+                          <a:ea typeface="Arial"/>
+                          <a:cs typeface="Arial"/>
+                        </a:rPr>
+                        <a:t>44%</a:t>
+                      </a:r>
+                    </a:p>
+                  </a:txBody>
+                  <a:tcPr anchor="ctr" marT="38100" marB="38100" marL="76200" marR="76200">
+                    <a:solidFill>
+                      <a:srgbClr val="FFFFFF"/>
+                    </a:solidFill>
+                  </a:tcPr>
+                </a:tc>
+                <a:tc>
+                  <a:txBody>
+                    <a:bodyPr wrap="square"/>
+                    <a:lstStyle/>
+                    <a:p>
+                      <a:pPr algn="ctr" rtl="1"/>
+                      <a:r>
+                        <a:rPr sz="1500" b="0">
+                          <a:solidFill>
+                            <a:srgbClr val="2C2C2C"/>
+                          </a:solidFill>
+                          <a:latin typeface="Arial"/>
+                          <a:ea typeface="Arial"/>
+                          <a:cs typeface="Arial"/>
+                        </a:rPr>
+                        <a:t>8,450</a:t>
+                      </a:r>
+                    </a:p>
+                  </a:txBody>
+                  <a:tcPr anchor="ctr" marT="38100" marB="38100" marL="76200" marR="76200">
+                    <a:solidFill>
+                      <a:srgbClr val="FFFFFF"/>
+                    </a:solidFill>
+                  </a:tcPr>
+                </a:tc>
+                <a:tc>
+                  <a:txBody>
+                    <a:bodyPr wrap="square"/>
+                    <a:lstStyle/>
+                    <a:p>
+                      <a:pPr algn="ctr" rtl="1"/>
+                      <a:r>
+                        <a:rPr sz="1500" b="0">
+                          <a:solidFill>
+                            <a:srgbClr val="2C2C2C"/>
+                          </a:solidFill>
+                          <a:latin typeface="Arial"/>
+                          <a:ea typeface="Arial"/>
+                          <a:cs typeface="Arial"/>
+                        </a:rPr>
+                        <a:t>~89,000</a:t>
+                      </a:r>
+                    </a:p>
+                  </a:txBody>
+                  <a:tcPr anchor="ctr" marT="38100" marB="38100" marL="76200" marR="76200">
+                    <a:solidFill>
+                      <a:srgbClr val="FFFFFF"/>
+                    </a:solidFill>
+                  </a:tcPr>
+                </a:tc>
+                <a:tc>
+                  <a:txBody>
+                    <a:bodyPr wrap="square"/>
+                    <a:lstStyle/>
+                    <a:p>
+                      <a:pPr algn="ctr" rtl="1"/>
+                      <a:r>
+                        <a:rPr sz="1500" b="0">
+                          <a:solidFill>
+                            <a:srgbClr val="2C2C2C"/>
+                          </a:solidFill>
+                          <a:latin typeface="Arial"/>
+                          <a:ea typeface="Arial"/>
+                          <a:cs typeface="Arial"/>
+                        </a:rPr>
+                        <a:t>23%</a:t>
+                      </a:r>
+                    </a:p>
+                  </a:txBody>
+                  <a:tcPr anchor="ctr" marT="38100" marB="38100" marL="76200" marR="76200">
+                    <a:solidFill>
+                      <a:srgbClr val="FFFFFF"/>
+                    </a:solidFill>
+                  </a:tcPr>
+                </a:tc>
+              </a:tr>
+            </a:tbl>
+          </a:graphicData>
+        </a:graphic>
+      </p:graphicFrame>
+      <p:sp>
+        <p:nvSpPr>
+          <p:cNvPr id="7" name="TextBox 6"/>
           <p:cNvSpPr txBox="1"/>
           <p:nvPr/>
         </p:nvSpPr>
         <p:spPr>
           <a:xfrm>
-            <a:off x="640080" y="1463040"/>
-            <a:ext cx="10972800" cy="4937760"/>
+            <a:off x="640080" y="4206240"/>
+            <a:ext cx="10972800" cy="1463040"/>
           </a:xfrm>
           <a:prstGeom prst="rect">
             <a:avLst/>
@@ -3557,71 +4095,62 @@
           <a:noFill/>
         </p:spPr>
         <p:txBody>
-          <a:bodyPr wrap="square">
+          <a:bodyPr wrap="square" anchor="t">
             <a:spAutoFit/>
           </a:bodyPr>
           <a:lstStyle/>
           <a:p>
             <a:pPr algn="r" rtl="1">
               <a:lnSpc>
-                <a:spcPct val="120000"/>
+                <a:spcPct val="115000"/>
               </a:lnSpc>
-              <a:spcAft>
-                <a:spcPts val="1000"/>
-              </a:spcAft>
             </a:pPr>
             <a:r>
-              <a:rPr sz="2200">
+              <a:rPr sz="1800" b="0">
                 <a:solidFill>
-                  <a:srgbClr val="2C2C2C"/>
+                  <a:srgbClr val="1F4E78"/>
                 </a:solidFill>
                 <a:latin typeface="Arial"/>
                 <a:ea typeface="Arial"/>
                 <a:cs typeface="Arial"/>
               </a:rPr>
-              <a:t>•  السنة 1: بناء قاعدة العميلات (الوصول لإشغال 50%+).</a:t>
+              <a:t>القرار المعتمد: سعر القائمة ~172.5 ريال شامل الضريبة (الصافي 150) — الحالة (أ).</a:t>
             </a:r>
           </a:p>
           <a:p>
             <a:pPr algn="r" rtl="1">
               <a:lnSpc>
-                <a:spcPct val="120000"/>
+                <a:spcPct val="115000"/>
               </a:lnSpc>
-              <a:spcAft>
-                <a:spcPts val="1000"/>
-              </a:spcAft>
             </a:pPr>
             <a:r>
-              <a:rPr sz="2200">
+              <a:rPr sz="1800" b="0">
                 <a:solidFill>
-                  <a:srgbClr val="2C2C2C"/>
+                  <a:srgbClr val="1F4E78"/>
                 </a:solidFill>
                 <a:latin typeface="Arial"/>
                 <a:ea typeface="Arial"/>
                 <a:cs typeface="Arial"/>
               </a:rPr>
-              <a:t>•  السنة 2: تثبيت الربحية + إضافة جهازين (120 م² تستوعب 8 أجهزة بنفس الإيجار).</a:t>
+              <a:t>رسوم الدفع والإهلاك أثرهما طفيف؛ معالجة الضريبة هي المتغيّر الحاسم،</a:t>
             </a:r>
           </a:p>
           <a:p>
             <a:pPr algn="r" rtl="1">
               <a:lnSpc>
-                <a:spcPct val="120000"/>
+                <a:spcPct val="115000"/>
               </a:lnSpc>
-              <a:spcAft>
-                <a:spcPts val="1000"/>
-              </a:spcAft>
             </a:pPr>
             <a:r>
-              <a:rPr sz="2200">
+              <a:rPr sz="1800" b="0">
                 <a:solidFill>
-                  <a:srgbClr val="2C2C2C"/>
+                  <a:srgbClr val="1F4E78"/>
                 </a:solidFill>
                 <a:latin typeface="Arial"/>
                 <a:ea typeface="Arial"/>
                 <a:cs typeface="Arial"/>
               </a:rPr>
-              <a:t>•  السنة 3+: غرفة نشاط ثانٍ (Mat/Barre) أو فرع ثانٍ عند إشغال 80%+ مستقر.</a:t>
+              <a:t>والمشروع يبقى مجدياً حتى في الحالة الأكثر تحفظاً.</a:t>
             </a:r>
           </a:p>
         </p:txBody>
@@ -3768,7 +4297,7 @@
                 <a:ea typeface="Arial"/>
                 <a:cs typeface="Arial"/>
               </a:rPr>
-              <a:t>المخاطر وتخفيفها</a:t>
+              <a:t>خطة النمو</a:t>
             </a:r>
           </a:p>
         </p:txBody>
@@ -3810,6 +4339,280 @@
                 <a:cs typeface="Arial"/>
               </a:rPr>
               <a:t>10</a:t>
+            </a:r>
+          </a:p>
+        </p:txBody>
+      </p:sp>
+      <p:sp>
+        <p:nvSpPr>
+          <p:cNvPr id="6" name="TextBox 5"/>
+          <p:cNvSpPr txBox="1"/>
+          <p:nvPr/>
+        </p:nvSpPr>
+        <p:spPr>
+          <a:xfrm>
+            <a:off x="640080" y="1463040"/>
+            <a:ext cx="10972800" cy="4937760"/>
+          </a:xfrm>
+          <a:prstGeom prst="rect">
+            <a:avLst/>
+          </a:prstGeom>
+          <a:noFill/>
+        </p:spPr>
+        <p:txBody>
+          <a:bodyPr wrap="square">
+            <a:spAutoFit/>
+          </a:bodyPr>
+          <a:lstStyle/>
+          <a:p>
+            <a:pPr algn="r" rtl="1">
+              <a:lnSpc>
+                <a:spcPct val="120000"/>
+              </a:lnSpc>
+              <a:spcAft>
+                <a:spcPts val="1000"/>
+              </a:spcAft>
+            </a:pPr>
+            <a:r>
+              <a:rPr sz="2200">
+                <a:solidFill>
+                  <a:srgbClr val="2C2C2C"/>
+                </a:solidFill>
+                <a:latin typeface="Arial"/>
+                <a:ea typeface="Arial"/>
+                <a:cs typeface="Arial"/>
+              </a:rPr>
+              <a:t>•  السنة 1: بناء قاعدة العميلات (الوصول لإشغال 50%+).</a:t>
+            </a:r>
+          </a:p>
+          <a:p>
+            <a:pPr algn="r" rtl="1">
+              <a:lnSpc>
+                <a:spcPct val="120000"/>
+              </a:lnSpc>
+              <a:spcAft>
+                <a:spcPts val="1000"/>
+              </a:spcAft>
+            </a:pPr>
+            <a:r>
+              <a:rPr sz="2200">
+                <a:solidFill>
+                  <a:srgbClr val="2C2C2C"/>
+                </a:solidFill>
+                <a:latin typeface="Arial"/>
+                <a:ea typeface="Arial"/>
+                <a:cs typeface="Arial"/>
+              </a:rPr>
+              <a:t>•  السنة 2: تثبيت الربحية + إضافة جهازين (120 م² تستوعب 8 أجهزة بنفس الإيجار).</a:t>
+            </a:r>
+          </a:p>
+          <a:p>
+            <a:pPr algn="r" rtl="1">
+              <a:lnSpc>
+                <a:spcPct val="120000"/>
+              </a:lnSpc>
+              <a:spcAft>
+                <a:spcPts val="1000"/>
+              </a:spcAft>
+            </a:pPr>
+            <a:r>
+              <a:rPr sz="2200">
+                <a:solidFill>
+                  <a:srgbClr val="2C2C2C"/>
+                </a:solidFill>
+                <a:latin typeface="Arial"/>
+                <a:ea typeface="Arial"/>
+                <a:cs typeface="Arial"/>
+              </a:rPr>
+              <a:t>•  السنة 3+: غرفة نشاط ثانٍ (Mat/Barre) أو فرع ثانٍ عند إشغال 80%+ مستقر.</a:t>
+            </a:r>
+          </a:p>
+        </p:txBody>
+      </p:sp>
+    </p:spTree>
+  </p:cSld>
+  <p:clrMapOvr>
+    <a:masterClrMapping/>
+  </p:clrMapOvr>
+</p:sld>
+</file>
+
+<file path=ppt/slides/slide12.xml><?xml version="1.0" encoding="utf-8"?>
+<p:sld xmlns:a="http://schemas.openxmlformats.org/drawingml/2006/main" xmlns:p="http://schemas.openxmlformats.org/presentationml/2006/main" xmlns:r="http://schemas.openxmlformats.org/officeDocument/2006/relationships">
+  <p:cSld>
+    <p:spTree>
+      <p:nvGrpSpPr>
+        <p:cNvPr id="1" name=""/>
+        <p:cNvGrpSpPr/>
+        <p:nvPr/>
+      </p:nvGrpSpPr>
+      <p:grpSpPr/>
+      <p:sp>
+        <p:nvSpPr>
+          <p:cNvPr id="2" name="Rectangle 1"/>
+          <p:cNvSpPr/>
+          <p:nvPr/>
+        </p:nvSpPr>
+        <p:spPr>
+          <a:xfrm>
+            <a:off x="0" y="0"/>
+            <a:ext cx="12191695" cy="1051560"/>
+          </a:xfrm>
+          <a:prstGeom prst="rect">
+            <a:avLst/>
+          </a:prstGeom>
+          <a:solidFill>
+            <a:srgbClr val="1F4E78"/>
+          </a:solidFill>
+          <a:ln>
+            <a:noFill/>
+          </a:ln>
+          <a:effectLst/>
+        </p:spPr>
+        <p:style>
+          <a:lnRef idx="1">
+            <a:schemeClr val="accent1"/>
+          </a:lnRef>
+          <a:fillRef idx="3">
+            <a:schemeClr val="accent1"/>
+          </a:fillRef>
+          <a:effectRef idx="2">
+            <a:schemeClr val="accent1"/>
+          </a:effectRef>
+          <a:fontRef idx="minor">
+            <a:schemeClr val="lt1"/>
+          </a:fontRef>
+        </p:style>
+        <p:txBody>
+          <a:bodyPr rtlCol="0" anchor="ctr"/>
+          <a:lstStyle/>
+          <a:p>
+            <a:pPr algn="ctr"/>
+          </a:p>
+        </p:txBody>
+      </p:sp>
+      <p:sp>
+        <p:nvSpPr>
+          <p:cNvPr id="3" name="Rectangle 2"/>
+          <p:cNvSpPr/>
+          <p:nvPr/>
+        </p:nvSpPr>
+        <p:spPr>
+          <a:xfrm>
+            <a:off x="0" y="1051560"/>
+            <a:ext cx="12191695" cy="50800"/>
+          </a:xfrm>
+          <a:prstGeom prst="rect">
+            <a:avLst/>
+          </a:prstGeom>
+          <a:solidFill>
+            <a:srgbClr val="2E8B8B"/>
+          </a:solidFill>
+          <a:ln>
+            <a:noFill/>
+          </a:ln>
+          <a:effectLst/>
+        </p:spPr>
+        <p:style>
+          <a:lnRef idx="1">
+            <a:schemeClr val="accent1"/>
+          </a:lnRef>
+          <a:fillRef idx="3">
+            <a:schemeClr val="accent1"/>
+          </a:fillRef>
+          <a:effectRef idx="2">
+            <a:schemeClr val="accent1"/>
+          </a:effectRef>
+          <a:fontRef idx="minor">
+            <a:schemeClr val="lt1"/>
+          </a:fontRef>
+        </p:style>
+        <p:txBody>
+          <a:bodyPr rtlCol="0" anchor="ctr"/>
+          <a:lstStyle/>
+          <a:p>
+            <a:pPr algn="ctr"/>
+          </a:p>
+        </p:txBody>
+      </p:sp>
+      <p:sp>
+        <p:nvSpPr>
+          <p:cNvPr id="4" name="TextBox 3"/>
+          <p:cNvSpPr txBox="1"/>
+          <p:nvPr/>
+        </p:nvSpPr>
+        <p:spPr>
+          <a:xfrm>
+            <a:off x="365760" y="164592"/>
+            <a:ext cx="11430000" cy="731520"/>
+          </a:xfrm>
+          <a:prstGeom prst="rect">
+            <a:avLst/>
+          </a:prstGeom>
+          <a:noFill/>
+        </p:spPr>
+        <p:txBody>
+          <a:bodyPr wrap="square" anchor="ctr">
+            <a:spAutoFit/>
+          </a:bodyPr>
+          <a:lstStyle/>
+          <a:p>
+            <a:pPr algn="r" rtl="1">
+              <a:lnSpc>
+                <a:spcPct val="115000"/>
+              </a:lnSpc>
+            </a:pPr>
+            <a:r>
+              <a:rPr sz="2600" b="1">
+                <a:solidFill>
+                  <a:srgbClr val="FFFFFF"/>
+                </a:solidFill>
+                <a:latin typeface="Arial"/>
+                <a:ea typeface="Arial"/>
+                <a:cs typeface="Arial"/>
+              </a:rPr>
+              <a:t>المخاطر وتخفيفها</a:t>
+            </a:r>
+          </a:p>
+        </p:txBody>
+      </p:sp>
+      <p:sp>
+        <p:nvSpPr>
+          <p:cNvPr id="5" name="TextBox 4"/>
+          <p:cNvSpPr txBox="1"/>
+          <p:nvPr/>
+        </p:nvSpPr>
+        <p:spPr>
+          <a:xfrm>
+            <a:off x="274320" y="274320"/>
+            <a:ext cx="1097280" cy="548640"/>
+          </a:xfrm>
+          <a:prstGeom prst="rect">
+            <a:avLst/>
+          </a:prstGeom>
+          <a:noFill/>
+        </p:spPr>
+        <p:txBody>
+          <a:bodyPr wrap="square" anchor="t">
+            <a:spAutoFit/>
+          </a:bodyPr>
+          <a:lstStyle/>
+          <a:p>
+            <a:pPr algn="l" rtl="1">
+              <a:lnSpc>
+                <a:spcPct val="115000"/>
+              </a:lnSpc>
+            </a:pPr>
+            <a:r>
+              <a:rPr sz="1800" b="1">
+                <a:solidFill>
+                  <a:srgbClr val="C9A227"/>
+                </a:solidFill>
+                <a:latin typeface="Arial"/>
+                <a:ea typeface="Arial"/>
+                <a:cs typeface="Arial"/>
+              </a:rPr>
+              <a:t>11</a:t>
             </a:r>
           </a:p>
         </p:txBody>
@@ -4108,7 +4911,7 @@
 </p:sld>
 </file>
 
-<file path=ppt/slides/slide12.xml><?xml version="1.0" encoding="utf-8"?>
+<file path=ppt/slides/slide13.xml><?xml version="1.0" encoding="utf-8"?>
 <p:sld xmlns:a="http://schemas.openxmlformats.org/drawingml/2006/main" xmlns:p="http://schemas.openxmlformats.org/presentationml/2006/main" xmlns:r="http://schemas.openxmlformats.org/officeDocument/2006/relationships">
   <p:cSld>
     <p:spTree>
@@ -4283,7 +5086,7 @@
                 <a:ea typeface="Arial"/>
                 <a:cs typeface="Arial"/>
               </a:rPr>
-              <a:t>11</a:t>
+              <a:t>12</a:t>
             </a:r>
           </a:p>
         </p:txBody>
@@ -4508,7 +5311,7 @@
 </p:sld>
 </file>
 
-<file path=ppt/slides/slide13.xml><?xml version="1.0" encoding="utf-8"?>
+<file path=ppt/slides/slide14.xml><?xml version="1.0" encoding="utf-8"?>
 <p:sld xmlns:a="http://schemas.openxmlformats.org/drawingml/2006/main" xmlns:p="http://schemas.openxmlformats.org/presentationml/2006/main" xmlns:r="http://schemas.openxmlformats.org/officeDocument/2006/relationships">
   <p:cSld>
     <p:spTree>
@@ -4683,7 +5486,7 @@
                 <a:ea typeface="Arial"/>
                 <a:cs typeface="Arial"/>
               </a:rPr>
-              <a:t>12</a:t>
+              <a:t>13</a:t>
             </a:r>
           </a:p>
         </p:txBody>

--- a/exports/عرض-المستثمر-بيلاتس.pptx
+++ b/exports/عرض-المستثمر-بيلاتس.pptx
@@ -19,6 +19,7 @@
     <p:sldId id="267" r:id="rId18"/>
     <p:sldId id="268" r:id="rId19"/>
     <p:sldId id="269" r:id="rId20"/>
+    <p:sldId id="270" r:id="rId21"/>
   </p:sldIdLst>
   <p:sldSz cx="12191695" cy="6858000" type="screen4x3"/>
   <p:notesSz cx="6858000" cy="9144000"/>
@@ -5045,7 +5046,7 @@
                 <a:ea typeface="Arial"/>
                 <a:cs typeface="Arial"/>
               </a:rPr>
-              <a:t>الطلب التمويلي</a:t>
+              <a:t>التدفق النقدي لسنة الإطلاق (Launch Runway)</a:t>
             </a:r>
           </a:p>
         </p:txBody>
@@ -5091,16 +5092,40 @@
           </a:p>
         </p:txBody>
       </p:sp>
-      <p:sp>
-        <p:nvSpPr>
-          <p:cNvPr id="6" name="TextBox 5"/>
+      <p:pic>
+        <p:nvPicPr>
+          <p:cNvPr id="6" name="Picture 5" descr="jcurve.png"/>
+          <p:cNvPicPr>
+            <a:picLocks noChangeAspect="1"/>
+          </p:cNvPicPr>
+          <p:nvPr/>
+        </p:nvPicPr>
+        <p:blipFill>
+          <a:blip r:embed="rId2"/>
+          <a:stretch>
+            <a:fillRect/>
+          </a:stretch>
+        </p:blipFill>
+        <p:spPr>
+          <a:xfrm>
+            <a:off x="841248" y="1325880"/>
+            <a:ext cx="10515600" cy="5277404"/>
+          </a:xfrm>
+          <a:prstGeom prst="rect">
+            <a:avLst/>
+          </a:prstGeom>
+        </p:spPr>
+      </p:pic>
+      <p:sp>
+        <p:nvSpPr>
+          <p:cNvPr id="7" name="TextBox 6"/>
           <p:cNvSpPr txBox="1"/>
           <p:nvPr/>
         </p:nvSpPr>
         <p:spPr>
           <a:xfrm>
-            <a:off x="640080" y="1554480"/>
-            <a:ext cx="10972800" cy="914400"/>
+            <a:off x="640080" y="6400800"/>
+            <a:ext cx="10972800" cy="365760"/>
           </a:xfrm>
           <a:prstGeom prst="rect">
             <a:avLst/>
@@ -5119,7 +5144,7 @@
               </a:lnSpc>
             </a:pPr>
             <a:r>
-              <a:rPr sz="2600" b="1">
+              <a:rPr sz="1300" b="1">
                 <a:solidFill>
                   <a:srgbClr val="1F4E78"/>
                 </a:solidFill>
@@ -5127,178 +5152,7 @@
                 <a:ea typeface="Arial"/>
                 <a:cs typeface="Arial"/>
               </a:rPr>
-              <a:t>التمويل المطلوب: 300,000 ريال (يشمل هامش أمان ~25 ألف)</a:t>
-            </a:r>
-          </a:p>
-        </p:txBody>
-      </p:sp>
-      <p:sp>
-        <p:nvSpPr>
-          <p:cNvPr id="7" name="TextBox 6"/>
-          <p:cNvSpPr txBox="1"/>
-          <p:nvPr/>
-        </p:nvSpPr>
-        <p:spPr>
-          <a:xfrm>
-            <a:off x="640080" y="2743200"/>
-            <a:ext cx="10972800" cy="3657600"/>
-          </a:xfrm>
-          <a:prstGeom prst="rect">
-            <a:avLst/>
-          </a:prstGeom>
-          <a:noFill/>
-        </p:spPr>
-        <p:txBody>
-          <a:bodyPr wrap="square">
-            <a:spAutoFit/>
-          </a:bodyPr>
-          <a:lstStyle/>
-          <a:p>
-            <a:pPr algn="r" rtl="1">
-              <a:lnSpc>
-                <a:spcPct val="120000"/>
-              </a:lnSpc>
-              <a:spcAft>
-                <a:spcPts val="1000"/>
-              </a:spcAft>
-            </a:pPr>
-            <a:r>
-              <a:rPr sz="2200">
-                <a:solidFill>
-                  <a:srgbClr val="2C2C2C"/>
-                </a:solidFill>
-                <a:latin typeface="Arial"/>
-                <a:ea typeface="Arial"/>
-                <a:cs typeface="Arial"/>
-              </a:rPr>
-              <a:t>•  استرداد كامل خلال السنة الثانية.</a:t>
-            </a:r>
-          </a:p>
-          <a:p>
-            <a:pPr algn="r" rtl="1">
-              <a:lnSpc>
-                <a:spcPct val="120000"/>
-              </a:lnSpc>
-              <a:spcAft>
-                <a:spcPts val="1000"/>
-              </a:spcAft>
-            </a:pPr>
-            <a:r>
-              <a:rPr sz="2200">
-                <a:solidFill>
-                  <a:srgbClr val="2C2C2C"/>
-                </a:solidFill>
-                <a:latin typeface="Arial"/>
-                <a:ea typeface="Arial"/>
-                <a:cs typeface="Arial"/>
-              </a:rPr>
-              <a:t>•  نقطة مراجعة أداء عند الشهر السادس قبل أي قرار توسعة.</a:t>
-            </a:r>
-          </a:p>
-          <a:p>
-            <a:pPr algn="r" rtl="1">
-              <a:lnSpc>
-                <a:spcPct val="120000"/>
-              </a:lnSpc>
-              <a:spcAft>
-                <a:spcPts val="1000"/>
-              </a:spcAft>
-            </a:pPr>
-            <a:r>
-              <a:rPr sz="2200">
-                <a:solidFill>
-                  <a:srgbClr val="2C2C2C"/>
-                </a:solidFill>
-                <a:latin typeface="Arial"/>
-                <a:ea typeface="Arial"/>
-                <a:cs typeface="Arial"/>
-              </a:rPr>
-              <a:t>•  التوصية: المضي قدماً (GO).</a:t>
-            </a:r>
-          </a:p>
-        </p:txBody>
-      </p:sp>
-      <p:sp>
-        <p:nvSpPr>
-          <p:cNvPr id="8" name="Rectangle 7"/>
-          <p:cNvSpPr/>
-          <p:nvPr/>
-        </p:nvSpPr>
-        <p:spPr>
-          <a:xfrm>
-            <a:off x="2286000" y="5120640"/>
-            <a:ext cx="7589520" cy="1005840"/>
-          </a:xfrm>
-          <a:prstGeom prst="rect">
-            <a:avLst/>
-          </a:prstGeom>
-          <a:solidFill>
-            <a:srgbClr val="2E8B8B"/>
-          </a:solidFill>
-          <a:ln>
-            <a:noFill/>
-          </a:ln>
-          <a:effectLst/>
-        </p:spPr>
-        <p:style>
-          <a:lnRef idx="1">
-            <a:schemeClr val="accent1"/>
-          </a:lnRef>
-          <a:fillRef idx="3">
-            <a:schemeClr val="accent1"/>
-          </a:fillRef>
-          <a:effectRef idx="2">
-            <a:schemeClr val="accent1"/>
-          </a:effectRef>
-          <a:fontRef idx="minor">
-            <a:schemeClr val="lt1"/>
-          </a:fontRef>
-        </p:style>
-        <p:txBody>
-          <a:bodyPr rtlCol="0" anchor="ctr"/>
-          <a:lstStyle/>
-          <a:p>
-            <a:pPr algn="ctr"/>
-          </a:p>
-        </p:txBody>
-      </p:sp>
-      <p:sp>
-        <p:nvSpPr>
-          <p:cNvPr id="9" name="TextBox 8"/>
-          <p:cNvSpPr txBox="1"/>
-          <p:nvPr/>
-        </p:nvSpPr>
-        <p:spPr>
-          <a:xfrm>
-            <a:off x="2286000" y="5120640"/>
-            <a:ext cx="7589520" cy="1005840"/>
-          </a:xfrm>
-          <a:prstGeom prst="rect">
-            <a:avLst/>
-          </a:prstGeom>
-          <a:noFill/>
-        </p:spPr>
-        <p:txBody>
-          <a:bodyPr wrap="square" anchor="ctr">
-            <a:spAutoFit/>
-          </a:bodyPr>
-          <a:lstStyle/>
-          <a:p>
-            <a:pPr algn="ctr" rtl="1">
-              <a:lnSpc>
-                <a:spcPct val="115000"/>
-              </a:lnSpc>
-            </a:pPr>
-            <a:r>
-              <a:rPr sz="1800" b="1">
-                <a:solidFill>
-                  <a:srgbClr val="FFFFFF"/>
-                </a:solidFill>
-                <a:latin typeface="Arial"/>
-                <a:ea typeface="Arial"/>
-                <a:cs typeface="Arial"/>
-              </a:rPr>
-              <a:t>استثمار صغير، نقطة تعادل منخفضة، عائد استثنائي — في سوق صاعد</a:t>
+              <a:t>القاع ~ -106 ألف (الشهر 5) ← يُوصى بتمويل 300 ألف / رأس مال عامل ~120 ألف</a:t>
             </a:r>
           </a:p>
         </p:txBody>
@@ -5445,7 +5299,7 @@
                 <a:ea typeface="Arial"/>
                 <a:cs typeface="Arial"/>
               </a:rPr>
-              <a:t>لماذا الآن؟</a:t>
+              <a:t>الطلب التمويلي</a:t>
             </a:r>
           </a:p>
         </p:txBody>
@@ -5487,6 +5341,406 @@
                 <a:cs typeface="Arial"/>
               </a:rPr>
               <a:t>13</a:t>
+            </a:r>
+          </a:p>
+        </p:txBody>
+      </p:sp>
+      <p:sp>
+        <p:nvSpPr>
+          <p:cNvPr id="6" name="TextBox 5"/>
+          <p:cNvSpPr txBox="1"/>
+          <p:nvPr/>
+        </p:nvSpPr>
+        <p:spPr>
+          <a:xfrm>
+            <a:off x="640080" y="1554480"/>
+            <a:ext cx="10972800" cy="914400"/>
+          </a:xfrm>
+          <a:prstGeom prst="rect">
+            <a:avLst/>
+          </a:prstGeom>
+          <a:noFill/>
+        </p:spPr>
+        <p:txBody>
+          <a:bodyPr wrap="square" anchor="t">
+            <a:spAutoFit/>
+          </a:bodyPr>
+          <a:lstStyle/>
+          <a:p>
+            <a:pPr algn="ctr" rtl="1">
+              <a:lnSpc>
+                <a:spcPct val="115000"/>
+              </a:lnSpc>
+            </a:pPr>
+            <a:r>
+              <a:rPr sz="2600" b="1">
+                <a:solidFill>
+                  <a:srgbClr val="1F4E78"/>
+                </a:solidFill>
+                <a:latin typeface="Arial"/>
+                <a:ea typeface="Arial"/>
+                <a:cs typeface="Arial"/>
+              </a:rPr>
+              <a:t>التمويل المطلوب: 300,000 ريال (يشمل هامش أمان ~25 ألف)</a:t>
+            </a:r>
+          </a:p>
+        </p:txBody>
+      </p:sp>
+      <p:sp>
+        <p:nvSpPr>
+          <p:cNvPr id="7" name="TextBox 6"/>
+          <p:cNvSpPr txBox="1"/>
+          <p:nvPr/>
+        </p:nvSpPr>
+        <p:spPr>
+          <a:xfrm>
+            <a:off x="640080" y="2743200"/>
+            <a:ext cx="10972800" cy="3657600"/>
+          </a:xfrm>
+          <a:prstGeom prst="rect">
+            <a:avLst/>
+          </a:prstGeom>
+          <a:noFill/>
+        </p:spPr>
+        <p:txBody>
+          <a:bodyPr wrap="square">
+            <a:spAutoFit/>
+          </a:bodyPr>
+          <a:lstStyle/>
+          <a:p>
+            <a:pPr algn="r" rtl="1">
+              <a:lnSpc>
+                <a:spcPct val="120000"/>
+              </a:lnSpc>
+              <a:spcAft>
+                <a:spcPts val="1000"/>
+              </a:spcAft>
+            </a:pPr>
+            <a:r>
+              <a:rPr sz="2200">
+                <a:solidFill>
+                  <a:srgbClr val="2C2C2C"/>
+                </a:solidFill>
+                <a:latin typeface="Arial"/>
+                <a:ea typeface="Arial"/>
+                <a:cs typeface="Arial"/>
+              </a:rPr>
+              <a:t>•  استرداد كامل خلال السنة الثانية.</a:t>
+            </a:r>
+          </a:p>
+          <a:p>
+            <a:pPr algn="r" rtl="1">
+              <a:lnSpc>
+                <a:spcPct val="120000"/>
+              </a:lnSpc>
+              <a:spcAft>
+                <a:spcPts val="1000"/>
+              </a:spcAft>
+            </a:pPr>
+            <a:r>
+              <a:rPr sz="2200">
+                <a:solidFill>
+                  <a:srgbClr val="2C2C2C"/>
+                </a:solidFill>
+                <a:latin typeface="Arial"/>
+                <a:ea typeface="Arial"/>
+                <a:cs typeface="Arial"/>
+              </a:rPr>
+              <a:t>•  نقطة مراجعة أداء عند الشهر السادس قبل أي قرار توسعة.</a:t>
+            </a:r>
+          </a:p>
+          <a:p>
+            <a:pPr algn="r" rtl="1">
+              <a:lnSpc>
+                <a:spcPct val="120000"/>
+              </a:lnSpc>
+              <a:spcAft>
+                <a:spcPts val="1000"/>
+              </a:spcAft>
+            </a:pPr>
+            <a:r>
+              <a:rPr sz="2200">
+                <a:solidFill>
+                  <a:srgbClr val="2C2C2C"/>
+                </a:solidFill>
+                <a:latin typeface="Arial"/>
+                <a:ea typeface="Arial"/>
+                <a:cs typeface="Arial"/>
+              </a:rPr>
+              <a:t>•  التوصية: المضي قدماً (GO).</a:t>
+            </a:r>
+          </a:p>
+        </p:txBody>
+      </p:sp>
+      <p:sp>
+        <p:nvSpPr>
+          <p:cNvPr id="8" name="Rectangle 7"/>
+          <p:cNvSpPr/>
+          <p:nvPr/>
+        </p:nvSpPr>
+        <p:spPr>
+          <a:xfrm>
+            <a:off x="2286000" y="5120640"/>
+            <a:ext cx="7589520" cy="1005840"/>
+          </a:xfrm>
+          <a:prstGeom prst="rect">
+            <a:avLst/>
+          </a:prstGeom>
+          <a:solidFill>
+            <a:srgbClr val="2E8B8B"/>
+          </a:solidFill>
+          <a:ln>
+            <a:noFill/>
+          </a:ln>
+          <a:effectLst/>
+        </p:spPr>
+        <p:style>
+          <a:lnRef idx="1">
+            <a:schemeClr val="accent1"/>
+          </a:lnRef>
+          <a:fillRef idx="3">
+            <a:schemeClr val="accent1"/>
+          </a:fillRef>
+          <a:effectRef idx="2">
+            <a:schemeClr val="accent1"/>
+          </a:effectRef>
+          <a:fontRef idx="minor">
+            <a:schemeClr val="lt1"/>
+          </a:fontRef>
+        </p:style>
+        <p:txBody>
+          <a:bodyPr rtlCol="0" anchor="ctr"/>
+          <a:lstStyle/>
+          <a:p>
+            <a:pPr algn="ctr"/>
+          </a:p>
+        </p:txBody>
+      </p:sp>
+      <p:sp>
+        <p:nvSpPr>
+          <p:cNvPr id="9" name="TextBox 8"/>
+          <p:cNvSpPr txBox="1"/>
+          <p:nvPr/>
+        </p:nvSpPr>
+        <p:spPr>
+          <a:xfrm>
+            <a:off x="2286000" y="5120640"/>
+            <a:ext cx="7589520" cy="1005840"/>
+          </a:xfrm>
+          <a:prstGeom prst="rect">
+            <a:avLst/>
+          </a:prstGeom>
+          <a:noFill/>
+        </p:spPr>
+        <p:txBody>
+          <a:bodyPr wrap="square" anchor="ctr">
+            <a:spAutoFit/>
+          </a:bodyPr>
+          <a:lstStyle/>
+          <a:p>
+            <a:pPr algn="ctr" rtl="1">
+              <a:lnSpc>
+                <a:spcPct val="115000"/>
+              </a:lnSpc>
+            </a:pPr>
+            <a:r>
+              <a:rPr sz="1800" b="1">
+                <a:solidFill>
+                  <a:srgbClr val="FFFFFF"/>
+                </a:solidFill>
+                <a:latin typeface="Arial"/>
+                <a:ea typeface="Arial"/>
+                <a:cs typeface="Arial"/>
+              </a:rPr>
+              <a:t>استثمار صغير، نقطة تعادل منخفضة، عائد استثنائي — في سوق صاعد</a:t>
+            </a:r>
+          </a:p>
+        </p:txBody>
+      </p:sp>
+    </p:spTree>
+  </p:cSld>
+  <p:clrMapOvr>
+    <a:masterClrMapping/>
+  </p:clrMapOvr>
+</p:sld>
+</file>
+
+<file path=ppt/slides/slide15.xml><?xml version="1.0" encoding="utf-8"?>
+<p:sld xmlns:a="http://schemas.openxmlformats.org/drawingml/2006/main" xmlns:p="http://schemas.openxmlformats.org/presentationml/2006/main" xmlns:r="http://schemas.openxmlformats.org/officeDocument/2006/relationships">
+  <p:cSld>
+    <p:spTree>
+      <p:nvGrpSpPr>
+        <p:cNvPr id="1" name=""/>
+        <p:cNvGrpSpPr/>
+        <p:nvPr/>
+      </p:nvGrpSpPr>
+      <p:grpSpPr/>
+      <p:sp>
+        <p:nvSpPr>
+          <p:cNvPr id="2" name="Rectangle 1"/>
+          <p:cNvSpPr/>
+          <p:nvPr/>
+        </p:nvSpPr>
+        <p:spPr>
+          <a:xfrm>
+            <a:off x="0" y="0"/>
+            <a:ext cx="12191695" cy="1051560"/>
+          </a:xfrm>
+          <a:prstGeom prst="rect">
+            <a:avLst/>
+          </a:prstGeom>
+          <a:solidFill>
+            <a:srgbClr val="1F4E78"/>
+          </a:solidFill>
+          <a:ln>
+            <a:noFill/>
+          </a:ln>
+          <a:effectLst/>
+        </p:spPr>
+        <p:style>
+          <a:lnRef idx="1">
+            <a:schemeClr val="accent1"/>
+          </a:lnRef>
+          <a:fillRef idx="3">
+            <a:schemeClr val="accent1"/>
+          </a:fillRef>
+          <a:effectRef idx="2">
+            <a:schemeClr val="accent1"/>
+          </a:effectRef>
+          <a:fontRef idx="minor">
+            <a:schemeClr val="lt1"/>
+          </a:fontRef>
+        </p:style>
+        <p:txBody>
+          <a:bodyPr rtlCol="0" anchor="ctr"/>
+          <a:lstStyle/>
+          <a:p>
+            <a:pPr algn="ctr"/>
+          </a:p>
+        </p:txBody>
+      </p:sp>
+      <p:sp>
+        <p:nvSpPr>
+          <p:cNvPr id="3" name="Rectangle 2"/>
+          <p:cNvSpPr/>
+          <p:nvPr/>
+        </p:nvSpPr>
+        <p:spPr>
+          <a:xfrm>
+            <a:off x="0" y="1051560"/>
+            <a:ext cx="12191695" cy="50800"/>
+          </a:xfrm>
+          <a:prstGeom prst="rect">
+            <a:avLst/>
+          </a:prstGeom>
+          <a:solidFill>
+            <a:srgbClr val="2E8B8B"/>
+          </a:solidFill>
+          <a:ln>
+            <a:noFill/>
+          </a:ln>
+          <a:effectLst/>
+        </p:spPr>
+        <p:style>
+          <a:lnRef idx="1">
+            <a:schemeClr val="accent1"/>
+          </a:lnRef>
+          <a:fillRef idx="3">
+            <a:schemeClr val="accent1"/>
+          </a:fillRef>
+          <a:effectRef idx="2">
+            <a:schemeClr val="accent1"/>
+          </a:effectRef>
+          <a:fontRef idx="minor">
+            <a:schemeClr val="lt1"/>
+          </a:fontRef>
+        </p:style>
+        <p:txBody>
+          <a:bodyPr rtlCol="0" anchor="ctr"/>
+          <a:lstStyle/>
+          <a:p>
+            <a:pPr algn="ctr"/>
+          </a:p>
+        </p:txBody>
+      </p:sp>
+      <p:sp>
+        <p:nvSpPr>
+          <p:cNvPr id="4" name="TextBox 3"/>
+          <p:cNvSpPr txBox="1"/>
+          <p:nvPr/>
+        </p:nvSpPr>
+        <p:spPr>
+          <a:xfrm>
+            <a:off x="365760" y="164592"/>
+            <a:ext cx="11430000" cy="731520"/>
+          </a:xfrm>
+          <a:prstGeom prst="rect">
+            <a:avLst/>
+          </a:prstGeom>
+          <a:noFill/>
+        </p:spPr>
+        <p:txBody>
+          <a:bodyPr wrap="square" anchor="ctr">
+            <a:spAutoFit/>
+          </a:bodyPr>
+          <a:lstStyle/>
+          <a:p>
+            <a:pPr algn="r" rtl="1">
+              <a:lnSpc>
+                <a:spcPct val="115000"/>
+              </a:lnSpc>
+            </a:pPr>
+            <a:r>
+              <a:rPr sz="2600" b="1">
+                <a:solidFill>
+                  <a:srgbClr val="FFFFFF"/>
+                </a:solidFill>
+                <a:latin typeface="Arial"/>
+                <a:ea typeface="Arial"/>
+                <a:cs typeface="Arial"/>
+              </a:rPr>
+              <a:t>لماذا الآن؟</a:t>
+            </a:r>
+          </a:p>
+        </p:txBody>
+      </p:sp>
+      <p:sp>
+        <p:nvSpPr>
+          <p:cNvPr id="5" name="TextBox 4"/>
+          <p:cNvSpPr txBox="1"/>
+          <p:nvPr/>
+        </p:nvSpPr>
+        <p:spPr>
+          <a:xfrm>
+            <a:off x="274320" y="274320"/>
+            <a:ext cx="1097280" cy="548640"/>
+          </a:xfrm>
+          <a:prstGeom prst="rect">
+            <a:avLst/>
+          </a:prstGeom>
+          <a:noFill/>
+        </p:spPr>
+        <p:txBody>
+          <a:bodyPr wrap="square" anchor="t">
+            <a:spAutoFit/>
+          </a:bodyPr>
+          <a:lstStyle/>
+          <a:p>
+            <a:pPr algn="l" rtl="1">
+              <a:lnSpc>
+                <a:spcPct val="115000"/>
+              </a:lnSpc>
+            </a:pPr>
+            <a:r>
+              <a:rPr sz="1800" b="1">
+                <a:solidFill>
+                  <a:srgbClr val="C9A227"/>
+                </a:solidFill>
+                <a:latin typeface="Arial"/>
+                <a:ea typeface="Arial"/>
+                <a:cs typeface="Arial"/>
+              </a:rPr>
+              <a:t>14</a:t>
             </a:r>
           </a:p>
         </p:txBody>
